--- a/output/Janatics_DDMR_Deck.pptx
+++ b/output/Janatics_DDMR_Deck.pptx
@@ -3424,7 +3424,7 @@
                   <a:srgbClr val="FFFFFF"/>
                 </a:solidFill>
               </a:rPr>
-              <a:t>DUE DILIGENCE &amp; MARKET REPORT</a:t>
+              <a:t>DIGITAL DIAGNOSTIC AND MATURITY REPORT</a:t>
             </a:r>
           </a:p>
         </p:txBody>

--- a/output/Janatics_DDMR_Deck.pptx
+++ b/output/Janatics_DDMR_Deck.pptx
@@ -14,6 +14,7 @@
     <p:sldId id="262" r:id="rId13"/>
     <p:sldId id="263" r:id="rId14"/>
     <p:sldId id="264" r:id="rId15"/>
+    <p:sldId id="265" r:id="rId16"/>
   </p:sldIdLst>
   <p:sldSz cx="12188952" cy="6858000" type="screen4x3"/>
   <p:notesSz cx="6858000" cy="9144000"/>
@@ -154,23 +155,23 @@
               <c:strCache>
                 <c:ptCount val="5"/>
                 <c:pt idx="0">
-                  <c:v>Strategy &amp;
-Leadership</c:v>
+                  <c:v>Strategy</c:v>
                 </c:pt>
                 <c:pt idx="1">
+                  <c:v>Operations &amp;
+Supply Chain</c:v>
+                </c:pt>
+                <c:pt idx="2">
                   <c:v>Sales &amp;
 Marketing</c:v>
                 </c:pt>
-                <c:pt idx="2">
-                  <c:v>Operations &amp;
-Supply Chain</c:v>
-                </c:pt>
                 <c:pt idx="3">
-                  <c:v>Finance</c:v>
+                  <c:v>Technology
+Adoption</c:v>
                 </c:pt>
                 <c:pt idx="4">
-                  <c:v>Industry
-Context</c:v>
+                  <c:v>Skills &amp;
+Capabilities</c:v>
                 </c:pt>
               </c:strCache>
             </c:strRef>
@@ -182,19 +183,19 @@
                 <c:formatCode>General</c:formatCode>
                 <c:ptCount val="5"/>
                 <c:pt idx="0">
-                  <c:v>81</c:v>
+                  <c:v>70</c:v>
                 </c:pt>
                 <c:pt idx="1">
-                  <c:v>78</c:v>
+                  <c:v>65</c:v>
                 </c:pt>
                 <c:pt idx="2">
-                  <c:v>78</c:v>
+                  <c:v>55</c:v>
                 </c:pt>
                 <c:pt idx="3">
-                  <c:v>67</c:v>
+                  <c:v>70</c:v>
                 </c:pt>
                 <c:pt idx="4">
-                  <c:v>75</c:v>
+                  <c:v>60</c:v>
                 </c:pt>
               </c:numCache>
             </c:numRef>
@@ -210,7 +211,7 @@
               <c:strCache>
                 <c:ptCount val="1"/>
                 <c:pt idx="0">
-                  <c:v>Benchmark (75)</c:v>
+                  <c:v>Benchmark (67)</c:v>
                 </c:pt>
               </c:strCache>
             </c:strRef>
@@ -221,23 +222,23 @@
               <c:strCache>
                 <c:ptCount val="5"/>
                 <c:pt idx="0">
-                  <c:v>Strategy &amp;
-Leadership</c:v>
+                  <c:v>Strategy</c:v>
                 </c:pt>
                 <c:pt idx="1">
+                  <c:v>Operations &amp;
+Supply Chain</c:v>
+                </c:pt>
+                <c:pt idx="2">
                   <c:v>Sales &amp;
 Marketing</c:v>
                 </c:pt>
-                <c:pt idx="2">
-                  <c:v>Operations &amp;
-Supply Chain</c:v>
-                </c:pt>
                 <c:pt idx="3">
-                  <c:v>Finance</c:v>
+                  <c:v>Technology
+Adoption</c:v>
                 </c:pt>
                 <c:pt idx="4">
-                  <c:v>Industry
-Context</c:v>
+                  <c:v>Skills &amp;
+Capabilities</c:v>
                 </c:pt>
               </c:strCache>
             </c:strRef>
@@ -249,19 +250,19 @@
                 <c:formatCode>General</c:formatCode>
                 <c:ptCount val="5"/>
                 <c:pt idx="0">
-                  <c:v>75</c:v>
+                  <c:v>67</c:v>
                 </c:pt>
                 <c:pt idx="1">
-                  <c:v>75</c:v>
+                  <c:v>67</c:v>
                 </c:pt>
                 <c:pt idx="2">
-                  <c:v>75</c:v>
+                  <c:v>67</c:v>
                 </c:pt>
                 <c:pt idx="3">
-                  <c:v>75</c:v>
+                  <c:v>67</c:v>
                 </c:pt>
                 <c:pt idx="4">
-                  <c:v>75</c:v>
+                  <c:v>67</c:v>
                 </c:pt>
               </c:numCache>
             </c:numRef>
@@ -3512,7 +3513,7 @@
             <a:avLst/>
           </a:prstGeom>
           <a:solidFill>
-            <a:srgbClr val="00B050"/>
+            <a:srgbClr val="FFC000"/>
           </a:solidFill>
           <a:ln>
             <a:noFill/>
@@ -3569,7 +3570,7 @@
                   <a:srgbClr val="FFFFFF"/>
                 </a:solidFill>
               </a:rPr>
-              <a:t>75.7/100</a:t>
+              <a:t>64/100</a:t>
             </a:r>
           </a:p>
         </p:txBody>
@@ -3603,7 +3604,7 @@
                   <a:srgbClr val="FFFFFF"/>
                 </a:solidFill>
               </a:rPr>
-              <a:t>COMPOSITE DDMR SCORE</a:t>
+              <a:t>COMPOSITE DDMR SCORE — Siloed</a:t>
             </a:r>
           </a:p>
         </p:txBody>
@@ -3638,6 +3639,828 @@
                 </a:solidFill>
               </a:rPr>
               <a:t>Report Date: 19 April 2026   |   Confidential</a:t>
+            </a:r>
+          </a:p>
+        </p:txBody>
+      </p:sp>
+    </p:spTree>
+  </p:cSld>
+  <p:clrMapOvr>
+    <a:masterClrMapping/>
+  </p:clrMapOvr>
+</p:sld>
+</file>
+
+<file path=ppt/slides/slide10.xml><?xml version="1.0" encoding="utf-8"?>
+<p:sld xmlns:a="http://schemas.openxmlformats.org/drawingml/2006/main" xmlns:p="http://schemas.openxmlformats.org/presentationml/2006/main" xmlns:r="http://schemas.openxmlformats.org/officeDocument/2006/relationships">
+  <p:cSld>
+    <p:spTree>
+      <p:nvGrpSpPr>
+        <p:cNvPr id="1" name=""/>
+        <p:cNvGrpSpPr/>
+        <p:nvPr/>
+      </p:nvGrpSpPr>
+      <p:grpSpPr/>
+      <p:sp>
+        <p:nvSpPr>
+          <p:cNvPr id="2" name="Rectangle 1"/>
+          <p:cNvSpPr/>
+          <p:nvPr/>
+        </p:nvSpPr>
+        <p:spPr>
+          <a:xfrm>
+            <a:off x="0" y="0"/>
+            <a:ext cx="12188952" cy="1005840"/>
+          </a:xfrm>
+          <a:prstGeom prst="rect">
+            <a:avLst/>
+          </a:prstGeom>
+          <a:solidFill>
+            <a:srgbClr val="1F3864"/>
+          </a:solidFill>
+          <a:ln>
+            <a:noFill/>
+          </a:ln>
+        </p:spPr>
+        <p:style>
+          <a:lnRef idx="1">
+            <a:schemeClr val="accent1"/>
+          </a:lnRef>
+          <a:fillRef idx="3">
+            <a:schemeClr val="accent1"/>
+          </a:fillRef>
+          <a:effectRef idx="2">
+            <a:schemeClr val="accent1"/>
+          </a:effectRef>
+          <a:fontRef idx="minor">
+            <a:schemeClr val="lt1"/>
+          </a:fontRef>
+        </p:style>
+        <p:txBody>
+          <a:bodyPr rtlCol="0" anchor="ctr"/>
+          <a:lstStyle/>
+          <a:p>
+            <a:pPr algn="ctr"/>
+          </a:p>
+        </p:txBody>
+      </p:sp>
+      <p:sp>
+        <p:nvSpPr>
+          <p:cNvPr id="3" name="TextBox 2"/>
+          <p:cNvSpPr txBox="1"/>
+          <p:nvPr/>
+        </p:nvSpPr>
+        <p:spPr>
+          <a:xfrm>
+            <a:off x="274320" y="137160"/>
+            <a:ext cx="11612880" cy="731520"/>
+          </a:xfrm>
+          <a:prstGeom prst="rect">
+            <a:avLst/>
+          </a:prstGeom>
+          <a:noFill/>
+        </p:spPr>
+        <p:txBody>
+          <a:bodyPr wrap="square">
+            <a:spAutoFit/>
+          </a:bodyPr>
+          <a:lstStyle/>
+          <a:p>
+            <a:pPr algn="l"/>
+            <a:r>
+              <a:rPr sz="2000" b="1" i="0">
+                <a:solidFill>
+                  <a:srgbClr val="FFFFFF"/>
+                </a:solidFill>
+              </a:rPr>
+              <a:t>Executive Recommendation</a:t>
+            </a:r>
+          </a:p>
+        </p:txBody>
+      </p:sp>
+      <p:sp>
+        <p:nvSpPr>
+          <p:cNvPr id="4" name="Rectangle 3"/>
+          <p:cNvSpPr/>
+          <p:nvPr/>
+        </p:nvSpPr>
+        <p:spPr>
+          <a:xfrm>
+            <a:off x="365760" y="1097280"/>
+            <a:ext cx="11430000" cy="640080"/>
+          </a:xfrm>
+          <a:prstGeom prst="rect">
+            <a:avLst/>
+          </a:prstGeom>
+          <a:solidFill>
+            <a:srgbClr val="FFC000"/>
+          </a:solidFill>
+          <a:ln>
+            <a:noFill/>
+          </a:ln>
+        </p:spPr>
+        <p:style>
+          <a:lnRef idx="1">
+            <a:schemeClr val="accent1"/>
+          </a:lnRef>
+          <a:fillRef idx="3">
+            <a:schemeClr val="accent1"/>
+          </a:fillRef>
+          <a:effectRef idx="2">
+            <a:schemeClr val="accent1"/>
+          </a:effectRef>
+          <a:fontRef idx="minor">
+            <a:schemeClr val="lt1"/>
+          </a:fontRef>
+        </p:style>
+        <p:txBody>
+          <a:bodyPr rtlCol="0" anchor="ctr"/>
+          <a:lstStyle/>
+          <a:p>
+            <a:pPr algn="ctr"/>
+          </a:p>
+        </p:txBody>
+      </p:sp>
+      <p:sp>
+        <p:nvSpPr>
+          <p:cNvPr id="5" name="TextBox 4"/>
+          <p:cNvSpPr txBox="1"/>
+          <p:nvPr/>
+        </p:nvSpPr>
+        <p:spPr>
+          <a:xfrm>
+            <a:off x="365760" y="1097280"/>
+            <a:ext cx="11430000" cy="640080"/>
+          </a:xfrm>
+          <a:prstGeom prst="rect">
+            <a:avLst/>
+          </a:prstGeom>
+          <a:noFill/>
+        </p:spPr>
+        <p:txBody>
+          <a:bodyPr wrap="square">
+            <a:spAutoFit/>
+          </a:bodyPr>
+          <a:lstStyle/>
+          <a:p>
+            <a:pPr algn="ctr"/>
+            <a:r>
+              <a:rPr sz="1300" b="1" i="0">
+                <a:solidFill>
+                  <a:srgbClr val="FFFFFF"/>
+                </a:solidFill>
+              </a:rPr>
+              <a:t>DDMR Composite Score: 64/100 — SILOED  |  Digital Transformation: Early-Stage Engagement Opportunity</a:t>
+            </a:r>
+          </a:p>
+        </p:txBody>
+      </p:sp>
+      <p:sp>
+        <p:nvSpPr>
+          <p:cNvPr id="6" name="Rectangle 5"/>
+          <p:cNvSpPr/>
+          <p:nvPr/>
+        </p:nvSpPr>
+        <p:spPr>
+          <a:xfrm>
+            <a:off x="365760" y="1920240"/>
+            <a:ext cx="2560320" cy="1005840"/>
+          </a:xfrm>
+          <a:prstGeom prst="rect">
+            <a:avLst/>
+          </a:prstGeom>
+          <a:solidFill>
+            <a:srgbClr val="2E75B6"/>
+          </a:solidFill>
+          <a:ln>
+            <a:noFill/>
+          </a:ln>
+        </p:spPr>
+        <p:style>
+          <a:lnRef idx="1">
+            <a:schemeClr val="accent1"/>
+          </a:lnRef>
+          <a:fillRef idx="3">
+            <a:schemeClr val="accent1"/>
+          </a:fillRef>
+          <a:effectRef idx="2">
+            <a:schemeClr val="accent1"/>
+          </a:effectRef>
+          <a:fontRef idx="minor">
+            <a:schemeClr val="lt1"/>
+          </a:fontRef>
+        </p:style>
+        <p:txBody>
+          <a:bodyPr rtlCol="0" anchor="ctr"/>
+          <a:lstStyle/>
+          <a:p>
+            <a:pPr algn="ctr"/>
+          </a:p>
+        </p:txBody>
+      </p:sp>
+      <p:sp>
+        <p:nvSpPr>
+          <p:cNvPr id="7" name="TextBox 6"/>
+          <p:cNvSpPr txBox="1"/>
+          <p:nvPr/>
+        </p:nvSpPr>
+        <p:spPr>
+          <a:xfrm>
+            <a:off x="411480" y="2011680"/>
+            <a:ext cx="2468880" cy="822960"/>
+          </a:xfrm>
+          <a:prstGeom prst="rect">
+            <a:avLst/>
+          </a:prstGeom>
+          <a:noFill/>
+        </p:spPr>
+        <p:txBody>
+          <a:bodyPr wrap="square">
+            <a:spAutoFit/>
+          </a:bodyPr>
+          <a:lstStyle/>
+          <a:p>
+            <a:pPr algn="l"/>
+            <a:r>
+              <a:rPr sz="1000" b="1" i="0">
+                <a:solidFill>
+                  <a:srgbClr val="FFFFFF"/>
+                </a:solidFill>
+              </a:rPr>
+              <a:t>Strengths to leverage</a:t>
+            </a:r>
+          </a:p>
+        </p:txBody>
+      </p:sp>
+      <p:sp>
+        <p:nvSpPr>
+          <p:cNvPr id="8" name="Rectangle 7"/>
+          <p:cNvSpPr/>
+          <p:nvPr/>
+        </p:nvSpPr>
+        <p:spPr>
+          <a:xfrm>
+            <a:off x="3017520" y="1920240"/>
+            <a:ext cx="8778240" cy="1005840"/>
+          </a:xfrm>
+          <a:prstGeom prst="rect">
+            <a:avLst/>
+          </a:prstGeom>
+          <a:solidFill>
+            <a:srgbClr val="D6E4F0"/>
+          </a:solidFill>
+          <a:ln>
+            <a:noFill/>
+          </a:ln>
+        </p:spPr>
+        <p:style>
+          <a:lnRef idx="1">
+            <a:schemeClr val="accent1"/>
+          </a:lnRef>
+          <a:fillRef idx="3">
+            <a:schemeClr val="accent1"/>
+          </a:fillRef>
+          <a:effectRef idx="2">
+            <a:schemeClr val="accent1"/>
+          </a:effectRef>
+          <a:fontRef idx="minor">
+            <a:schemeClr val="lt1"/>
+          </a:fontRef>
+        </p:style>
+        <p:txBody>
+          <a:bodyPr rtlCol="0" anchor="ctr"/>
+          <a:lstStyle/>
+          <a:p>
+            <a:pPr algn="ctr"/>
+          </a:p>
+        </p:txBody>
+      </p:sp>
+      <p:sp>
+        <p:nvSpPr>
+          <p:cNvPr id="9" name="TextBox 8"/>
+          <p:cNvSpPr txBox="1"/>
+          <p:nvPr/>
+        </p:nvSpPr>
+        <p:spPr>
+          <a:xfrm>
+            <a:off x="3108960" y="1965960"/>
+            <a:ext cx="8595360" cy="914400"/>
+          </a:xfrm>
+          <a:prstGeom prst="rect">
+            <a:avLst/>
+          </a:prstGeom>
+          <a:noFill/>
+        </p:spPr>
+        <p:txBody>
+          <a:bodyPr wrap="square">
+            <a:spAutoFit/>
+          </a:bodyPr>
+          <a:lstStyle/>
+          <a:p>
+            <a:pPr algn="l"/>
+            <a:r>
+              <a:rPr sz="900" b="0" i="0">
+                <a:solidFill>
+                  <a:srgbClr val="1F3864"/>
+                </a:solidFill>
+              </a:rPr>
+              <a:t>DSIR R&amp;D and I4.0 product portfolio demonstrate product-layer digital competence. Strong manufacturing base (70k sqm, 3 plants, 3,500+ SKUs) and ICRA Stable credit provide a stable foundation for digital investment.</a:t>
+            </a:r>
+          </a:p>
+        </p:txBody>
+      </p:sp>
+      <p:sp>
+        <p:nvSpPr>
+          <p:cNvPr id="10" name="Rectangle 9"/>
+          <p:cNvSpPr/>
+          <p:nvPr/>
+        </p:nvSpPr>
+        <p:spPr>
+          <a:xfrm>
+            <a:off x="365760" y="3108960"/>
+            <a:ext cx="2560320" cy="1005840"/>
+          </a:xfrm>
+          <a:prstGeom prst="rect">
+            <a:avLst/>
+          </a:prstGeom>
+          <a:solidFill>
+            <a:srgbClr val="2E75B6"/>
+          </a:solidFill>
+          <a:ln>
+            <a:noFill/>
+          </a:ln>
+        </p:spPr>
+        <p:style>
+          <a:lnRef idx="1">
+            <a:schemeClr val="accent1"/>
+          </a:lnRef>
+          <a:fillRef idx="3">
+            <a:schemeClr val="accent1"/>
+          </a:fillRef>
+          <a:effectRef idx="2">
+            <a:schemeClr val="accent1"/>
+          </a:effectRef>
+          <a:fontRef idx="minor">
+            <a:schemeClr val="lt1"/>
+          </a:fontRef>
+        </p:style>
+        <p:txBody>
+          <a:bodyPr rtlCol="0" anchor="ctr"/>
+          <a:lstStyle/>
+          <a:p>
+            <a:pPr algn="ctr"/>
+          </a:p>
+        </p:txBody>
+      </p:sp>
+      <p:sp>
+        <p:nvSpPr>
+          <p:cNvPr id="11" name="TextBox 10"/>
+          <p:cNvSpPr txBox="1"/>
+          <p:nvPr/>
+        </p:nvSpPr>
+        <p:spPr>
+          <a:xfrm>
+            <a:off x="411480" y="3200400"/>
+            <a:ext cx="2468880" cy="822960"/>
+          </a:xfrm>
+          <a:prstGeom prst="rect">
+            <a:avLst/>
+          </a:prstGeom>
+          <a:noFill/>
+        </p:spPr>
+        <p:txBody>
+          <a:bodyPr wrap="square">
+            <a:spAutoFit/>
+          </a:bodyPr>
+          <a:lstStyle/>
+          <a:p>
+            <a:pPr algn="l"/>
+            <a:r>
+              <a:rPr sz="1000" b="1" i="0">
+                <a:solidFill>
+                  <a:srgbClr val="FFFFFF"/>
+                </a:solidFill>
+              </a:rPr>
+              <a:t>Priority gaps</a:t>
+            </a:r>
+          </a:p>
+        </p:txBody>
+      </p:sp>
+      <p:sp>
+        <p:nvSpPr>
+          <p:cNvPr id="12" name="Rectangle 11"/>
+          <p:cNvSpPr/>
+          <p:nvPr/>
+        </p:nvSpPr>
+        <p:spPr>
+          <a:xfrm>
+            <a:off x="3017520" y="3108960"/>
+            <a:ext cx="8778240" cy="1005840"/>
+          </a:xfrm>
+          <a:prstGeom prst="rect">
+            <a:avLst/>
+          </a:prstGeom>
+          <a:solidFill>
+            <a:srgbClr val="D6E4F0"/>
+          </a:solidFill>
+          <a:ln>
+            <a:noFill/>
+          </a:ln>
+        </p:spPr>
+        <p:style>
+          <a:lnRef idx="1">
+            <a:schemeClr val="accent1"/>
+          </a:lnRef>
+          <a:fillRef idx="3">
+            <a:schemeClr val="accent1"/>
+          </a:fillRef>
+          <a:effectRef idx="2">
+            <a:schemeClr val="accent1"/>
+          </a:effectRef>
+          <a:fontRef idx="minor">
+            <a:schemeClr val="lt1"/>
+          </a:fontRef>
+        </p:style>
+        <p:txBody>
+          <a:bodyPr rtlCol="0" anchor="ctr"/>
+          <a:lstStyle/>
+          <a:p>
+            <a:pPr algn="ctr"/>
+          </a:p>
+        </p:txBody>
+      </p:sp>
+      <p:sp>
+        <p:nvSpPr>
+          <p:cNvPr id="13" name="TextBox 12"/>
+          <p:cNvSpPr txBox="1"/>
+          <p:nvPr/>
+        </p:nvSpPr>
+        <p:spPr>
+          <a:xfrm>
+            <a:off x="3108960" y="3154680"/>
+            <a:ext cx="8595360" cy="914400"/>
+          </a:xfrm>
+          <a:prstGeom prst="rect">
+            <a:avLst/>
+          </a:prstGeom>
+          <a:noFill/>
+        </p:spPr>
+        <p:txBody>
+          <a:bodyPr wrap="square">
+            <a:spAutoFit/>
+          </a:bodyPr>
+          <a:lstStyle/>
+          <a:p>
+            <a:pPr algn="l"/>
+            <a:r>
+              <a:rPr sz="900" b="0" i="0">
+                <a:solidFill>
+                  <a:srgbClr val="1F3864"/>
+                </a:solidFill>
+              </a:rPr>
+              <a:t>Digital sales channel (SM03: 45/100) and supply chain visibility (OSC02: 50/100) are the two lowest-scoring sub-metrics — quick wins with measurable ROI. Social media engagement (SM02: 40/100) requires immediate activation.</a:t>
+            </a:r>
+          </a:p>
+        </p:txBody>
+      </p:sp>
+      <p:sp>
+        <p:nvSpPr>
+          <p:cNvPr id="14" name="Rectangle 13"/>
+          <p:cNvSpPr/>
+          <p:nvPr/>
+        </p:nvSpPr>
+        <p:spPr>
+          <a:xfrm>
+            <a:off x="365760" y="4297680"/>
+            <a:ext cx="2560320" cy="1005840"/>
+          </a:xfrm>
+          <a:prstGeom prst="rect">
+            <a:avLst/>
+          </a:prstGeom>
+          <a:solidFill>
+            <a:srgbClr val="2E75B6"/>
+          </a:solidFill>
+          <a:ln>
+            <a:noFill/>
+          </a:ln>
+        </p:spPr>
+        <p:style>
+          <a:lnRef idx="1">
+            <a:schemeClr val="accent1"/>
+          </a:lnRef>
+          <a:fillRef idx="3">
+            <a:schemeClr val="accent1"/>
+          </a:fillRef>
+          <a:effectRef idx="2">
+            <a:schemeClr val="accent1"/>
+          </a:effectRef>
+          <a:fontRef idx="minor">
+            <a:schemeClr val="lt1"/>
+          </a:fontRef>
+        </p:style>
+        <p:txBody>
+          <a:bodyPr rtlCol="0" anchor="ctr"/>
+          <a:lstStyle/>
+          <a:p>
+            <a:pPr algn="ctr"/>
+          </a:p>
+        </p:txBody>
+      </p:sp>
+      <p:sp>
+        <p:nvSpPr>
+          <p:cNvPr id="15" name="TextBox 14"/>
+          <p:cNvSpPr txBox="1"/>
+          <p:nvPr/>
+        </p:nvSpPr>
+        <p:spPr>
+          <a:xfrm>
+            <a:off x="411480" y="4389120"/>
+            <a:ext cx="2468880" cy="822960"/>
+          </a:xfrm>
+          <a:prstGeom prst="rect">
+            <a:avLst/>
+          </a:prstGeom>
+          <a:noFill/>
+        </p:spPr>
+        <p:txBody>
+          <a:bodyPr wrap="square">
+            <a:spAutoFit/>
+          </a:bodyPr>
+          <a:lstStyle/>
+          <a:p>
+            <a:pPr algn="l"/>
+            <a:r>
+              <a:rPr sz="1000" b="1" i="0">
+                <a:solidFill>
+                  <a:srgbClr val="FFFFFF"/>
+                </a:solidFill>
+              </a:rPr>
+              <a:t>Recommended DX initiatives</a:t>
+            </a:r>
+          </a:p>
+        </p:txBody>
+      </p:sp>
+      <p:sp>
+        <p:nvSpPr>
+          <p:cNvPr id="16" name="Rectangle 15"/>
+          <p:cNvSpPr/>
+          <p:nvPr/>
+        </p:nvSpPr>
+        <p:spPr>
+          <a:xfrm>
+            <a:off x="3017520" y="4297680"/>
+            <a:ext cx="8778240" cy="1005840"/>
+          </a:xfrm>
+          <a:prstGeom prst="rect">
+            <a:avLst/>
+          </a:prstGeom>
+          <a:solidFill>
+            <a:srgbClr val="D6E4F0"/>
+          </a:solidFill>
+          <a:ln>
+            <a:noFill/>
+          </a:ln>
+        </p:spPr>
+        <p:style>
+          <a:lnRef idx="1">
+            <a:schemeClr val="accent1"/>
+          </a:lnRef>
+          <a:fillRef idx="3">
+            <a:schemeClr val="accent1"/>
+          </a:fillRef>
+          <a:effectRef idx="2">
+            <a:schemeClr val="accent1"/>
+          </a:effectRef>
+          <a:fontRef idx="minor">
+            <a:schemeClr val="lt1"/>
+          </a:fontRef>
+        </p:style>
+        <p:txBody>
+          <a:bodyPr rtlCol="0" anchor="ctr"/>
+          <a:lstStyle/>
+          <a:p>
+            <a:pPr algn="ctr"/>
+          </a:p>
+        </p:txBody>
+      </p:sp>
+      <p:sp>
+        <p:nvSpPr>
+          <p:cNvPr id="17" name="TextBox 16"/>
+          <p:cNvSpPr txBox="1"/>
+          <p:nvPr/>
+        </p:nvSpPr>
+        <p:spPr>
+          <a:xfrm>
+            <a:off x="3108960" y="4343400"/>
+            <a:ext cx="8595360" cy="914400"/>
+          </a:xfrm>
+          <a:prstGeom prst="rect">
+            <a:avLst/>
+          </a:prstGeom>
+          <a:noFill/>
+        </p:spPr>
+        <p:txBody>
+          <a:bodyPr wrap="square">
+            <a:spAutoFit/>
+          </a:bodyPr>
+          <a:lstStyle/>
+          <a:p>
+            <a:pPr algn="l"/>
+            <a:r>
+              <a:rPr sz="900" b="0" i="0">
+                <a:solidFill>
+                  <a:srgbClr val="1F3864"/>
+                </a:solidFill>
+              </a:rPr>
+              <a:t>1. Deploy B2B digital ordering portal and SEO-optimised product catalog. 2. Publish ERP/SCM roadmap — signals operational maturity to global OEM buyers. 3. Launch digital upskilling program for engineering workforce (SC03: 50/100). 4. Appoint digital transformation lead or CDO.</a:t>
+            </a:r>
+          </a:p>
+        </p:txBody>
+      </p:sp>
+      <p:sp>
+        <p:nvSpPr>
+          <p:cNvPr id="18" name="Rectangle 17"/>
+          <p:cNvSpPr/>
+          <p:nvPr/>
+        </p:nvSpPr>
+        <p:spPr>
+          <a:xfrm>
+            <a:off x="365760" y="5486400"/>
+            <a:ext cx="2560320" cy="1005840"/>
+          </a:xfrm>
+          <a:prstGeom prst="rect">
+            <a:avLst/>
+          </a:prstGeom>
+          <a:solidFill>
+            <a:srgbClr val="2E75B6"/>
+          </a:solidFill>
+          <a:ln>
+            <a:noFill/>
+          </a:ln>
+        </p:spPr>
+        <p:style>
+          <a:lnRef idx="1">
+            <a:schemeClr val="accent1"/>
+          </a:lnRef>
+          <a:fillRef idx="3">
+            <a:schemeClr val="accent1"/>
+          </a:fillRef>
+          <a:effectRef idx="2">
+            <a:schemeClr val="accent1"/>
+          </a:effectRef>
+          <a:fontRef idx="minor">
+            <a:schemeClr val="lt1"/>
+          </a:fontRef>
+        </p:style>
+        <p:txBody>
+          <a:bodyPr rtlCol="0" anchor="ctr"/>
+          <a:lstStyle/>
+          <a:p>
+            <a:pPr algn="ctr"/>
+          </a:p>
+        </p:txBody>
+      </p:sp>
+      <p:sp>
+        <p:nvSpPr>
+          <p:cNvPr id="19" name="TextBox 18"/>
+          <p:cNvSpPr txBox="1"/>
+          <p:nvPr/>
+        </p:nvSpPr>
+        <p:spPr>
+          <a:xfrm>
+            <a:off x="411480" y="5577840"/>
+            <a:ext cx="2468880" cy="822960"/>
+          </a:xfrm>
+          <a:prstGeom prst="rect">
+            <a:avLst/>
+          </a:prstGeom>
+          <a:noFill/>
+        </p:spPr>
+        <p:txBody>
+          <a:bodyPr wrap="square">
+            <a:spAutoFit/>
+          </a:bodyPr>
+          <a:lstStyle/>
+          <a:p>
+            <a:pPr algn="l"/>
+            <a:r>
+              <a:rPr sz="1000" b="1" i="0">
+                <a:solidFill>
+                  <a:srgbClr val="FFFFFF"/>
+                </a:solidFill>
+              </a:rPr>
+              <a:t>Opportunity</a:t>
+            </a:r>
+          </a:p>
+        </p:txBody>
+      </p:sp>
+      <p:sp>
+        <p:nvSpPr>
+          <p:cNvPr id="20" name="Rectangle 19"/>
+          <p:cNvSpPr/>
+          <p:nvPr/>
+        </p:nvSpPr>
+        <p:spPr>
+          <a:xfrm>
+            <a:off x="3017520" y="5486400"/>
+            <a:ext cx="8778240" cy="1005840"/>
+          </a:xfrm>
+          <a:prstGeom prst="rect">
+            <a:avLst/>
+          </a:prstGeom>
+          <a:solidFill>
+            <a:srgbClr val="D6E4F0"/>
+          </a:solidFill>
+          <a:ln>
+            <a:noFill/>
+          </a:ln>
+        </p:spPr>
+        <p:style>
+          <a:lnRef idx="1">
+            <a:schemeClr val="accent1"/>
+          </a:lnRef>
+          <a:fillRef idx="3">
+            <a:schemeClr val="accent1"/>
+          </a:fillRef>
+          <a:effectRef idx="2">
+            <a:schemeClr val="accent1"/>
+          </a:effectRef>
+          <a:fontRef idx="minor">
+            <a:schemeClr val="lt1"/>
+          </a:fontRef>
+        </p:style>
+        <p:txBody>
+          <a:bodyPr rtlCol="0" anchor="ctr"/>
+          <a:lstStyle/>
+          <a:p>
+            <a:pPr algn="ctr"/>
+          </a:p>
+        </p:txBody>
+      </p:sp>
+      <p:sp>
+        <p:nvSpPr>
+          <p:cNvPr id="21" name="TextBox 20"/>
+          <p:cNvSpPr txBox="1"/>
+          <p:nvPr/>
+        </p:nvSpPr>
+        <p:spPr>
+          <a:xfrm>
+            <a:off x="3108960" y="5532120"/>
+            <a:ext cx="8595360" cy="914400"/>
+          </a:xfrm>
+          <a:prstGeom prst="rect">
+            <a:avLst/>
+          </a:prstGeom>
+          <a:noFill/>
+        </p:spPr>
+        <p:txBody>
+          <a:bodyPr wrap="square">
+            <a:spAutoFit/>
+          </a:bodyPr>
+          <a:lstStyle/>
+          <a:p>
+            <a:pPr algn="l"/>
+            <a:r>
+              <a:rPr sz="900" b="0" i="0">
+                <a:solidFill>
+                  <a:srgbClr val="1F3864"/>
+                </a:solidFill>
+              </a:rPr>
+              <a:t>Janatics' own I4.0 product expertise creates a credibility-led path to internal digitization — using their own sensors and automation products to modernize their manufacturing is a compelling narrative for global OEM customers assessing vendor digital maturity.</a:t>
+            </a:r>
+          </a:p>
+        </p:txBody>
+      </p:sp>
+      <p:sp>
+        <p:nvSpPr>
+          <p:cNvPr id="22" name="TextBox 21"/>
+          <p:cNvSpPr txBox="1"/>
+          <p:nvPr/>
+        </p:nvSpPr>
+        <p:spPr>
+          <a:xfrm>
+            <a:off x="365760" y="6492240"/>
+            <a:ext cx="11430000" cy="274320"/>
+          </a:xfrm>
+          <a:prstGeom prst="rect">
+            <a:avLst/>
+          </a:prstGeom>
+          <a:noFill/>
+        </p:spPr>
+        <p:txBody>
+          <a:bodyPr wrap="square">
+            <a:spAutoFit/>
+          </a:bodyPr>
+          <a:lstStyle/>
+          <a:p>
+            <a:pPr algn="ctr"/>
+            <a:r>
+              <a:rPr sz="800" b="0" i="1">
+                <a:solidFill>
+                  <a:srgbClr val="404040"/>
+                </a:solidFill>
+              </a:rPr>
+              <a:t>Report generated: 19 April 2026  |  Janatics India Private Limited  |  DDMR v1.0</a:t>
             </a:r>
           </a:p>
         </p:txBody>
@@ -4810,7 +5633,7 @@
                   <a:srgbClr val="1F3864"/>
                 </a:solidFill>
               </a:rPr>
-              <a:t>662 (Aug 2025)</a:t>
+              <a:t>662</a:t>
             </a:r>
           </a:p>
         </p:txBody>
@@ -5983,7 +6806,7 @@
                   <a:srgbClr val="FFFFFF"/>
                 </a:solidFill>
               </a:rPr>
-              <a:t>DDMR Dimension Scorecard</a:t>
+              <a:t>DDMR Digital Maturity Scorecard</a:t>
             </a:r>
           </a:p>
         </p:txBody>
@@ -6078,7 +6901,7 @@
                   <a:srgbClr val="FFFFFF"/>
                 </a:solidFill>
               </a:rPr>
-              <a:t>81</a:t>
+              <a:t>70</a:t>
             </a:r>
           </a:p>
         </p:txBody>
@@ -6155,7 +6978,7 @@
                   <a:srgbClr val="1F3864"/>
                 </a:solidFill>
               </a:rPr>
-              <a:t>SL: Strategy &amp; Leadership</a:t>
+              <a:t>ST: Strategy  [Strategic]</a:t>
             </a:r>
           </a:p>
         </p:txBody>
@@ -6175,7 +6998,7 @@
             <a:avLst/>
           </a:prstGeom>
           <a:solidFill>
-            <a:srgbClr val="00B050"/>
+            <a:srgbClr val="FFC000"/>
           </a:solidFill>
           <a:ln>
             <a:noFill/>
@@ -6232,7 +7055,7 @@
                   <a:srgbClr val="FFFFFF"/>
                 </a:solidFill>
               </a:rPr>
-              <a:t>78</a:t>
+              <a:t>65</a:t>
             </a:r>
           </a:p>
         </p:txBody>
@@ -6309,7 +7132,7 @@
                   <a:srgbClr val="1F3864"/>
                 </a:solidFill>
               </a:rPr>
-              <a:t>SM: Sales &amp; Marketing</a:t>
+              <a:t>OSC: Operations &amp; Supply Chain  [Siloed]</a:t>
             </a:r>
           </a:p>
         </p:txBody>
@@ -6329,7 +7152,7 @@
             <a:avLst/>
           </a:prstGeom>
           <a:solidFill>
-            <a:srgbClr val="00B050"/>
+            <a:srgbClr val="FFC000"/>
           </a:solidFill>
           <a:ln>
             <a:noFill/>
@@ -6386,7 +7209,7 @@
                   <a:srgbClr val="FFFFFF"/>
                 </a:solidFill>
               </a:rPr>
-              <a:t>78</a:t>
+              <a:t>55</a:t>
             </a:r>
           </a:p>
         </p:txBody>
@@ -6463,7 +7286,7 @@
                   <a:srgbClr val="1F3864"/>
                 </a:solidFill>
               </a:rPr>
-              <a:t>OSC: Operations &amp; Supply Chain</a:t>
+              <a:t>SM: Sales &amp; Marketing  [Siloed]</a:t>
             </a:r>
           </a:p>
         </p:txBody>
@@ -6483,7 +7306,7 @@
             <a:avLst/>
           </a:prstGeom>
           <a:solidFill>
-            <a:srgbClr val="FFC000"/>
+            <a:srgbClr val="00B050"/>
           </a:solidFill>
           <a:ln>
             <a:noFill/>
@@ -6540,7 +7363,7 @@
                   <a:srgbClr val="FFFFFF"/>
                 </a:solidFill>
               </a:rPr>
-              <a:t>67</a:t>
+              <a:t>70</a:t>
             </a:r>
           </a:p>
         </p:txBody>
@@ -6617,7 +7440,7 @@
                   <a:srgbClr val="1F3864"/>
                 </a:solidFill>
               </a:rPr>
-              <a:t>FIN: Finance</a:t>
+              <a:t>TA: Technology Adoption  [Strategic]</a:t>
             </a:r>
           </a:p>
         </p:txBody>
@@ -6637,7 +7460,7 @@
             <a:avLst/>
           </a:prstGeom>
           <a:solidFill>
-            <a:srgbClr val="00B050"/>
+            <a:srgbClr val="FFC000"/>
           </a:solidFill>
           <a:ln>
             <a:noFill/>
@@ -6694,7 +7517,7 @@
                   <a:srgbClr val="FFFFFF"/>
                 </a:solidFill>
               </a:rPr>
-              <a:t>75</a:t>
+              <a:t>60</a:t>
             </a:r>
           </a:p>
         </p:txBody>
@@ -6771,7 +7594,7 @@
                   <a:srgbClr val="1F3864"/>
                 </a:solidFill>
               </a:rPr>
-              <a:t>IC: Industry Context</a:t>
+              <a:t>SC: Skills &amp; Capabilities  [Siloed]</a:t>
             </a:r>
           </a:p>
         </p:txBody>
@@ -6791,7 +7614,7 @@
             <a:avLst/>
           </a:prstGeom>
           <a:solidFill>
-            <a:srgbClr val="2E75B6"/>
+            <a:srgbClr val="FFC000"/>
           </a:solidFill>
           <a:ln>
             <a:noFill/>
@@ -6848,7 +7671,7 @@
                   <a:srgbClr val="FFFFFF"/>
                 </a:solidFill>
               </a:rPr>
-              <a:t>Composite Score: 75.7/100  —  Strong</a:t>
+              <a:t>Composite Score: 64/100  —  Siloed</a:t>
             </a:r>
           </a:p>
         </p:txBody>
@@ -6943,7 +7766,7 @@
                   <a:srgbClr val="FFFFFF"/>
                 </a:solidFill>
               </a:rPr>
-              <a:t>SL: Strategy &amp; Leadership</a:t>
+              <a:t>ST: Strategy</a:t>
             </a:r>
           </a:p>
         </p:txBody>
@@ -6977,7 +7800,7 @@
                   <a:srgbClr val="FFFFFF"/>
                 </a:solidFill>
               </a:rPr>
-              <a:t>Score: 81/100   |   Weight: 25%</a:t>
+              <a:t>Score: 70/100   |   Maturity: Strategic   |   Weight: 20%</a:t>
             </a:r>
           </a:p>
         </p:txBody>
@@ -7054,7 +7877,7 @@
                   <a:srgbClr val="FFFFFF"/>
                 </a:solidFill>
               </a:rPr>
-              <a:t>81/100</a:t>
+              <a:t>70/100</a:t>
             </a:r>
           </a:p>
         </p:txBody>
@@ -7131,7 +7954,7 @@
                   <a:srgbClr val="404040"/>
                 </a:solidFill>
               </a:rPr>
-              <a:t>Founded 1977 — 49-year operational track record, incorporated 1991</a:t>
+              <a:t>Product portfolio pivot to I4.0 equipment — electric actuators, smart sensors, robotics</a:t>
             </a:r>
           </a:p>
         </p:txBody>
@@ -7208,7 +8031,7 @@
                   <a:srgbClr val="404040"/>
                 </a:solidFill>
               </a:rPr>
-              <a:t>3 active directors | AGM Sept 2024 | ROC Coimbatore filings current</a:t>
+              <a:t>DSIR-recognized R&amp;D division — structured technology investment commitment</a:t>
             </a:r>
           </a:p>
         </p:txBody>
@@ -7285,7 +8108,7 @@
                   <a:srgbClr val="404040"/>
                 </a:solidFill>
               </a:rPr>
-              <a:t>Global footprint: 42+ countries | Subsidiaries: USA and Germany</a:t>
+              <a:t>No formal digital transformation roadmap or DX strategy publicly disclosed</a:t>
             </a:r>
           </a:p>
         </p:txBody>
@@ -7362,7 +8185,7 @@
                   <a:srgbClr val="404040"/>
                 </a:solidFill>
               </a:rPr>
-              <a:t>DSIR-recognized R&amp;D division | 200 global distribution partners</a:t>
+              <a:t>No chief digital officer or digital leadership appointment evidenced</a:t>
             </a:r>
           </a:p>
         </p:txBody>
@@ -7439,7 +8262,7 @@
                   <a:srgbClr val="404040"/>
                 </a:solidFill>
               </a:rPr>
-              <a:t>Strategic pivot: electric actuators, robotics, Industry 4.0 products</a:t>
+              <a:t>Technology partnerships limited to DSIR; no digital ecosystem alliances disclosed</a:t>
             </a:r>
           </a:p>
         </p:txBody>
@@ -7516,7 +8339,7 @@
                   <a:srgbClr val="404040"/>
                 </a:solidFill>
               </a:rPr>
-              <a:t>ICRA-rated debt profile | Stable outlook | Healthy debt protection</a:t>
+              <a:t>Innovation pipeline: incremental product extension; no open innovation signals</a:t>
             </a:r>
           </a:p>
         </p:txBody>
@@ -7627,7 +8450,7 @@
                   <a:srgbClr val="1F3864"/>
                 </a:solidFill>
               </a:rPr>
-              <a:t>SL01 Tenure</a:t>
+              <a:t>ST01 DX Strategy</a:t>
             </a:r>
           </a:p>
         </p:txBody>
@@ -7684,13 +8507,13 @@
         <p:spPr>
           <a:xfrm>
             <a:off x="9921239" y="1527048"/>
-            <a:ext cx="1481328" cy="256032"/>
-          </a:xfrm>
-          <a:prstGeom prst="rect">
-            <a:avLst/>
-          </a:prstGeom>
-          <a:solidFill>
-            <a:srgbClr val="00B050"/>
+            <a:ext cx="1069848" cy="256032"/>
+          </a:xfrm>
+          <a:prstGeom prst="rect">
+            <a:avLst/>
+          </a:prstGeom>
+          <a:solidFill>
+            <a:srgbClr val="FFC000"/>
           </a:solidFill>
           <a:ln>
             <a:noFill/>
@@ -7744,10 +8567,10 @@
             <a:r>
               <a:rPr sz="900" b="1" i="0">
                 <a:solidFill>
-                  <a:srgbClr val="00B050"/>
-                </a:solidFill>
-              </a:rPr>
-              <a:t>90</a:t>
+                  <a:srgbClr val="FFC000"/>
+                </a:solidFill>
+              </a:rPr>
+              <a:t>65</a:t>
             </a:r>
           </a:p>
         </p:txBody>
@@ -7781,7 +8604,7 @@
                   <a:srgbClr val="1F3864"/>
                 </a:solidFill>
               </a:rPr>
-              <a:t>SL02 Directors</a:t>
+              <a:t>ST02 Leadership Vision</a:t>
             </a:r>
           </a:p>
         </p:txBody>
@@ -7838,7 +8661,7 @@
         <p:spPr>
           <a:xfrm>
             <a:off x="9921239" y="2121408"/>
-            <a:ext cx="1234440" cy="256032"/>
+            <a:ext cx="1185062" cy="256032"/>
           </a:xfrm>
           <a:prstGeom prst="rect">
             <a:avLst/>
@@ -7901,7 +8724,7 @@
                   <a:srgbClr val="00B050"/>
                 </a:solidFill>
               </a:rPr>
-              <a:t>75</a:t>
+              <a:t>72</a:t>
             </a:r>
           </a:p>
         </p:txBody>
@@ -7935,7 +8758,7 @@
                   <a:srgbClr val="1F3864"/>
                 </a:solidFill>
               </a:rPr>
-              <a:t>SL03 Governance</a:t>
+              <a:t>ST03 Investment</a:t>
             </a:r>
           </a:p>
         </p:txBody>
@@ -7992,7 +8815,7 @@
         <p:spPr>
           <a:xfrm>
             <a:off x="9921239" y="2715768"/>
-            <a:ext cx="1316736" cy="256032"/>
+            <a:ext cx="1234440" cy="256032"/>
           </a:xfrm>
           <a:prstGeom prst="rect">
             <a:avLst/>
@@ -8055,7 +8878,7 @@
                   <a:srgbClr val="00B050"/>
                 </a:solidFill>
               </a:rPr>
-              <a:t>80</a:t>
+              <a:t>75</a:t>
             </a:r>
           </a:p>
         </p:txBody>
@@ -8089,7 +8912,7 @@
                   <a:srgbClr val="1F3864"/>
                 </a:solidFill>
               </a:rPr>
-              <a:t>SL04 Debt</a:t>
+              <a:t>ST04 Tech Partnerships</a:t>
             </a:r>
           </a:p>
         </p:txBody>
@@ -8146,7 +8969,7 @@
         <p:spPr>
           <a:xfrm>
             <a:off x="9921239" y="3310128"/>
-            <a:ext cx="1283817" cy="256032"/>
+            <a:ext cx="1119225" cy="256032"/>
           </a:xfrm>
           <a:prstGeom prst="rect">
             <a:avLst/>
@@ -8209,7 +9032,7 @@
                   <a:srgbClr val="00B050"/>
                 </a:solidFill>
               </a:rPr>
-              <a:t>78</a:t>
+              <a:t>68</a:t>
             </a:r>
           </a:p>
         </p:txBody>
@@ -8243,7 +9066,7 @@
                   <a:srgbClr val="1F3864"/>
                 </a:solidFill>
               </a:rPr>
-              <a:t>SL05 Strategy</a:t>
+              <a:t>ST05 Innovation</a:t>
             </a:r>
           </a:p>
         </p:txBody>
@@ -8300,7 +9123,7 @@
         <p:spPr>
           <a:xfrm>
             <a:off x="9921239" y="3904488"/>
-            <a:ext cx="1349654" cy="256032"/>
+            <a:ext cx="1152144" cy="256032"/>
           </a:xfrm>
           <a:prstGeom prst="rect">
             <a:avLst/>
@@ -8363,168 +9186,14 @@
                   <a:srgbClr val="00B050"/>
                 </a:solidFill>
               </a:rPr>
-              <a:t>82</a:t>
-            </a:r>
-          </a:p>
-        </p:txBody>
-      </p:sp>
-      <p:sp>
-        <p:nvSpPr>
-          <p:cNvPr id="41" name="TextBox 40"/>
-          <p:cNvSpPr txBox="1"/>
-          <p:nvPr/>
-        </p:nvSpPr>
-        <p:spPr>
-          <a:xfrm>
-            <a:off x="8046720" y="4389120"/>
-            <a:ext cx="1828800" cy="475488"/>
-          </a:xfrm>
-          <a:prstGeom prst="rect">
-            <a:avLst/>
-          </a:prstGeom>
-          <a:noFill/>
-        </p:spPr>
-        <p:txBody>
-          <a:bodyPr wrap="square">
-            <a:spAutoFit/>
-          </a:bodyPr>
-          <a:lstStyle/>
-          <a:p>
-            <a:pPr algn="l"/>
-            <a:r>
-              <a:rPr sz="900" b="0" i="0">
-                <a:solidFill>
-                  <a:srgbClr val="1F3864"/>
-                </a:solidFill>
-              </a:rPr>
-              <a:t>SL06 Global</a:t>
-            </a:r>
-          </a:p>
-        </p:txBody>
-      </p:sp>
-      <p:sp>
-        <p:nvSpPr>
-          <p:cNvPr id="42" name="Rectangle 41"/>
-          <p:cNvSpPr/>
-          <p:nvPr/>
-        </p:nvSpPr>
-        <p:spPr>
-          <a:xfrm>
-            <a:off x="9921239" y="4498848"/>
-            <a:ext cx="1645920" cy="256032"/>
-          </a:xfrm>
-          <a:prstGeom prst="rect">
-            <a:avLst/>
-          </a:prstGeom>
-          <a:solidFill>
-            <a:srgbClr val="D6E4F0"/>
-          </a:solidFill>
-          <a:ln>
-            <a:noFill/>
-          </a:ln>
-        </p:spPr>
-        <p:style>
-          <a:lnRef idx="1">
-            <a:schemeClr val="accent1"/>
-          </a:lnRef>
-          <a:fillRef idx="3">
-            <a:schemeClr val="accent1"/>
-          </a:fillRef>
-          <a:effectRef idx="2">
-            <a:schemeClr val="accent1"/>
-          </a:effectRef>
-          <a:fontRef idx="minor">
-            <a:schemeClr val="lt1"/>
-          </a:fontRef>
-        </p:style>
-        <p:txBody>
-          <a:bodyPr rtlCol="0" anchor="ctr"/>
-          <a:lstStyle/>
-          <a:p>
-            <a:pPr algn="ctr"/>
-          </a:p>
-        </p:txBody>
-      </p:sp>
-      <p:sp>
-        <p:nvSpPr>
-          <p:cNvPr id="43" name="Rectangle 42"/>
-          <p:cNvSpPr/>
-          <p:nvPr/>
-        </p:nvSpPr>
-        <p:spPr>
-          <a:xfrm>
-            <a:off x="9921239" y="4498848"/>
-            <a:ext cx="1448409" cy="256032"/>
-          </a:xfrm>
-          <a:prstGeom prst="rect">
-            <a:avLst/>
-          </a:prstGeom>
-          <a:solidFill>
-            <a:srgbClr val="00B050"/>
-          </a:solidFill>
-          <a:ln>
-            <a:noFill/>
-          </a:ln>
-        </p:spPr>
-        <p:style>
-          <a:lnRef idx="1">
-            <a:schemeClr val="accent1"/>
-          </a:lnRef>
-          <a:fillRef idx="3">
-            <a:schemeClr val="accent1"/>
-          </a:fillRef>
-          <a:effectRef idx="2">
-            <a:schemeClr val="accent1"/>
-          </a:effectRef>
-          <a:fontRef idx="minor">
-            <a:schemeClr val="lt1"/>
-          </a:fontRef>
-        </p:style>
-        <p:txBody>
-          <a:bodyPr rtlCol="0" anchor="ctr"/>
-          <a:lstStyle/>
-          <a:p>
-            <a:pPr algn="ctr"/>
-          </a:p>
-        </p:txBody>
-      </p:sp>
-      <p:sp>
-        <p:nvSpPr>
-          <p:cNvPr id="44" name="TextBox 43"/>
-          <p:cNvSpPr txBox="1"/>
-          <p:nvPr/>
-        </p:nvSpPr>
-        <p:spPr>
-          <a:xfrm>
-            <a:off x="11612880" y="4389120"/>
-            <a:ext cx="365760" cy="475488"/>
-          </a:xfrm>
-          <a:prstGeom prst="rect">
-            <a:avLst/>
-          </a:prstGeom>
-          <a:noFill/>
-        </p:spPr>
-        <p:txBody>
-          <a:bodyPr wrap="square">
-            <a:spAutoFit/>
-          </a:bodyPr>
-          <a:lstStyle/>
-          <a:p>
-            <a:pPr algn="l"/>
-            <a:r>
-              <a:rPr sz="900" b="1" i="0">
-                <a:solidFill>
-                  <a:srgbClr val="00B050"/>
-                </a:solidFill>
-              </a:rPr>
-              <a:t>88</a:t>
-            </a:r>
-          </a:p>
-        </p:txBody>
-      </p:sp>
-      <p:sp>
-        <p:nvSpPr>
-          <p:cNvPr id="45" name="Rectangle 44"/>
+              <a:t>70</a:t>
+            </a:r>
+          </a:p>
+        </p:txBody>
+      </p:sp>
+      <p:sp>
+        <p:nvSpPr>
+          <p:cNvPr id="41" name="Rectangle 40"/>
           <p:cNvSpPr/>
           <p:nvPr/>
         </p:nvSpPr>
@@ -8567,7 +9236,7 @@
       </p:sp>
       <p:sp>
         <p:nvSpPr>
-          <p:cNvPr id="46" name="TextBox 45"/>
+          <p:cNvPr id="42" name="TextBox 41"/>
           <p:cNvSpPr txBox="1"/>
           <p:nvPr/>
         </p:nvSpPr>
@@ -8594,14 +9263,14 @@
                   <a:srgbClr val="FFFFFF"/>
                 </a:solidFill>
               </a:rPr>
-              <a:t>Key Strength: 49-year brand | Global in 42 countries</a:t>
-            </a:r>
-          </a:p>
-        </p:txBody>
-      </p:sp>
-      <p:sp>
-        <p:nvSpPr>
-          <p:cNvPr id="47" name="Rectangle 46"/>
+              <a:t>Key Strength: DSIR R&amp;D + I4.0 product pivot signal digital leadership awareness</a:t>
+            </a:r>
+          </a:p>
+        </p:txBody>
+      </p:sp>
+      <p:sp>
+        <p:nvSpPr>
+          <p:cNvPr id="43" name="Rectangle 42"/>
           <p:cNvSpPr/>
           <p:nvPr/>
         </p:nvSpPr>
@@ -8644,7 +9313,7 @@
       </p:sp>
       <p:sp>
         <p:nvSpPr>
-          <p:cNvPr id="48" name="TextBox 47"/>
+          <p:cNvPr id="44" name="TextBox 43"/>
           <p:cNvSpPr txBox="1"/>
           <p:nvPr/>
         </p:nvSpPr>
@@ -8671,7 +9340,7 @@
                   <a:srgbClr val="FFFFFF"/>
                 </a:solidFill>
               </a:rPr>
-              <a:t>Risk: No public ESG / independent director disclosures</a:t>
+              <a:t>Risk: No formal DX roadmap or strategy publicly articulated</a:t>
             </a:r>
           </a:p>
         </p:txBody>
@@ -8709,7 +9378,7 @@
             <a:avLst/>
           </a:prstGeom>
           <a:solidFill>
-            <a:srgbClr val="00B050"/>
+            <a:srgbClr val="FFC000"/>
           </a:solidFill>
           <a:ln>
             <a:noFill/>
@@ -8766,7 +9435,7 @@
                   <a:srgbClr val="FFFFFF"/>
                 </a:solidFill>
               </a:rPr>
-              <a:t>SM: Sales &amp; Marketing</a:t>
+              <a:t>OSC: Operations &amp; Supply Chain</a:t>
             </a:r>
           </a:p>
         </p:txBody>
@@ -8800,7 +9469,7 @@
                   <a:srgbClr val="FFFFFF"/>
                 </a:solidFill>
               </a:rPr>
-              <a:t>Score: 78/100   |   Weight: 20%</a:t>
+              <a:t>Score: 65/100   |   Maturity: Siloed   |   Weight: 20%</a:t>
             </a:r>
           </a:p>
         </p:txBody>
@@ -8877,7 +9546,7 @@
                   <a:srgbClr val="FFFFFF"/>
                 </a:solidFill>
               </a:rPr>
-              <a:t>78/100</a:t>
+              <a:t>65/100</a:t>
             </a:r>
           </a:p>
         </p:txBody>
@@ -8897,7 +9566,7 @@
             <a:avLst/>
           </a:prstGeom>
           <a:solidFill>
-            <a:srgbClr val="00B050"/>
+            <a:srgbClr val="FFC000"/>
           </a:solidFill>
           <a:ln>
             <a:noFill/>
@@ -8954,7 +9623,7 @@
                   <a:srgbClr val="404040"/>
                 </a:solidFill>
               </a:rPr>
-              <a:t>FY2025 Revenue: ₹531 Crore (₹507.9 Cr FY2024 → 4% YoY growth)</a:t>
+              <a:t>70,000 sqm Coimbatore HQ | Ahmedabad + Noida plants — strong physical footprint</a:t>
             </a:r>
           </a:p>
         </p:txBody>
@@ -8974,7 +9643,7 @@
             <a:avLst/>
           </a:prstGeom>
           <a:solidFill>
-            <a:srgbClr val="00B050"/>
+            <a:srgbClr val="FFC000"/>
           </a:solidFill>
           <a:ln>
             <a:noFill/>
@@ -9031,7 +9700,7 @@
                   <a:srgbClr val="404040"/>
                 </a:solidFill>
               </a:rPr>
-              <a:t>Industry CAGR: 6.9% — Janatics growing slightly below sector pace</a:t>
+              <a:t>CNC machining, casting, surface treatment — physical automation well established</a:t>
             </a:r>
           </a:p>
         </p:txBody>
@@ -9051,7 +9720,7 @@
             <a:avLst/>
           </a:prstGeom>
           <a:solidFill>
-            <a:srgbClr val="00B050"/>
+            <a:srgbClr val="FFC000"/>
           </a:solidFill>
           <a:ln>
             <a:noFill/>
@@ -9108,7 +9777,7 @@
                   <a:srgbClr val="404040"/>
                 </a:solidFill>
               </a:rPr>
-              <a:t>17,000+ customers across 7 industries — low concentration risk</a:t>
+              <a:t>No ERP, MES, or supply chain visibility platform publicly disclosed</a:t>
             </a:r>
           </a:p>
         </p:txBody>
@@ -9128,7 +9797,7 @@
             <a:avLst/>
           </a:prstGeom>
           <a:solidFill>
-            <a:srgbClr val="00B050"/>
+            <a:srgbClr val="FFC000"/>
           </a:solidFill>
           <a:ln>
             <a:noFill/>
@@ -9185,7 +9854,7 @@
                   <a:srgbClr val="404040"/>
                 </a:solidFill>
               </a:rPr>
-              <a:t>200 global distribution partners | 3 manufacturing plants nationally</a:t>
+              <a:t>No Industry 4.0 certification or smart factory initiative announced</a:t>
             </a:r>
           </a:p>
         </p:txBody>
@@ -9205,7 +9874,7 @@
             <a:avLst/>
           </a:prstGeom>
           <a:solidFill>
-            <a:srgbClr val="00B050"/>
+            <a:srgbClr val="FFC000"/>
           </a:solidFill>
           <a:ln>
             <a:noFill/>
@@ -9262,7 +9931,7 @@
                   <a:srgbClr val="404040"/>
                 </a:solidFill>
               </a:rPr>
-              <a:t>Own-brand (Janatics) | AIA India member | 49-year brand equity</a:t>
+              <a:t>I4.0 product portfolio demonstrates concept awareness but internal adoption unclear</a:t>
             </a:r>
           </a:p>
         </p:txBody>
@@ -9282,7 +9951,7 @@
             <a:avLst/>
           </a:prstGeom>
           <a:solidFill>
-            <a:srgbClr val="00B050"/>
+            <a:srgbClr val="FFC000"/>
           </a:solidFill>
           <a:ln>
             <a:noFill/>
@@ -9339,7 +10008,7 @@
                   <a:srgbClr val="404040"/>
                 </a:solidFill>
               </a:rPr>
-              <a:t>Digital commerce channel not yet activated — potential growth lever</a:t>
+              <a:t>Quality management practices consistent with ICRA compliance; formal system unconfirmed</a:t>
             </a:r>
           </a:p>
         </p:txBody>
@@ -9450,7 +10119,7 @@
                   <a:srgbClr val="1F3864"/>
                 </a:solidFill>
               </a:rPr>
-              <a:t>SM01 Rev Growth</a:t>
+              <a:t>OSC01 Mfg Readiness</a:t>
             </a:r>
           </a:p>
         </p:txBody>
@@ -9507,7 +10176,7 @@
         <p:spPr>
           <a:xfrm>
             <a:off x="9921239" y="1527048"/>
-            <a:ext cx="905256" cy="256032"/>
+            <a:ext cx="987552" cy="256032"/>
           </a:xfrm>
           <a:prstGeom prst="rect">
             <a:avLst/>
@@ -9570,7 +10239,7 @@
                   <a:srgbClr val="FFC000"/>
                 </a:solidFill>
               </a:rPr>
-              <a:t>55</a:t>
+              <a:t>60</a:t>
             </a:r>
           </a:p>
         </p:txBody>
@@ -9604,7 +10273,7 @@
                   <a:srgbClr val="1F3864"/>
                 </a:solidFill>
               </a:rPr>
-              <a:t>SM02 Scale</a:t>
+              <a:t>OSC02 SC Visibility</a:t>
             </a:r>
           </a:p>
         </p:txBody>
@@ -9661,13 +10330,13 @@
         <p:spPr>
           <a:xfrm>
             <a:off x="9921239" y="2121408"/>
-            <a:ext cx="1316736" cy="256032"/>
-          </a:xfrm>
-          <a:prstGeom prst="rect">
-            <a:avLst/>
-          </a:prstGeom>
-          <a:solidFill>
-            <a:srgbClr val="00B050"/>
+            <a:ext cx="822960" cy="256032"/>
+          </a:xfrm>
+          <a:prstGeom prst="rect">
+            <a:avLst/>
+          </a:prstGeom>
+          <a:solidFill>
+            <a:srgbClr val="FFC000"/>
           </a:solidFill>
           <a:ln>
             <a:noFill/>
@@ -9721,10 +10390,10 @@
             <a:r>
               <a:rPr sz="900" b="1" i="0">
                 <a:solidFill>
-                  <a:srgbClr val="00B050"/>
-                </a:solidFill>
-              </a:rPr>
-              <a:t>80</a:t>
+                  <a:srgbClr val="FFC000"/>
+                </a:solidFill>
+              </a:rPr>
+              <a:t>50</a:t>
             </a:r>
           </a:p>
         </p:txBody>
@@ -9758,7 +10427,7 @@
                   <a:srgbClr val="1F3864"/>
                 </a:solidFill>
               </a:rPr>
-              <a:t>SM03 Customers</a:t>
+              <a:t>OSC03 Automation</a:t>
             </a:r>
           </a:p>
         </p:txBody>
@@ -9815,7 +10484,7 @@
         <p:spPr>
           <a:xfrm>
             <a:off x="9921239" y="2715768"/>
-            <a:ext cx="1481328" cy="256032"/>
+            <a:ext cx="1152144" cy="256032"/>
           </a:xfrm>
           <a:prstGeom prst="rect">
             <a:avLst/>
@@ -9878,7 +10547,7 @@
                   <a:srgbClr val="00B050"/>
                 </a:solidFill>
               </a:rPr>
-              <a:t>90</a:t>
+              <a:t>70</a:t>
             </a:r>
           </a:p>
         </p:txBody>
@@ -9912,7 +10581,7 @@
                   <a:srgbClr val="1F3864"/>
                 </a:solidFill>
               </a:rPr>
-              <a:t>SM04 Distribution</a:t>
+              <a:t>OSC04 Quality Mgmt</a:t>
             </a:r>
           </a:p>
         </p:txBody>
@@ -9969,7 +10638,7 @@
         <p:spPr>
           <a:xfrm>
             <a:off x="9921239" y="3310128"/>
-            <a:ext cx="1399032" cy="256032"/>
+            <a:ext cx="1185062" cy="256032"/>
           </a:xfrm>
           <a:prstGeom prst="rect">
             <a:avLst/>
@@ -10032,7 +10701,7 @@
                   <a:srgbClr val="00B050"/>
                 </a:solidFill>
               </a:rPr>
-              <a:t>85</a:t>
+              <a:t>72</a:t>
             </a:r>
           </a:p>
         </p:txBody>
@@ -10066,7 +10735,7 @@
                   <a:srgbClr val="1F3864"/>
                 </a:solidFill>
               </a:rPr>
-              <a:t>SM05 Brand</a:t>
+              <a:t>OSC05 I4.0 Integration</a:t>
             </a:r>
           </a:p>
         </p:txBody>
@@ -10123,7 +10792,7 @@
         <p:spPr>
           <a:xfrm>
             <a:off x="9921239" y="3904488"/>
-            <a:ext cx="1316736" cy="256032"/>
+            <a:ext cx="1201521" cy="256032"/>
           </a:xfrm>
           <a:prstGeom prst="rect">
             <a:avLst/>
@@ -10186,7 +10855,7 @@
                   <a:srgbClr val="00B050"/>
                 </a:solidFill>
               </a:rPr>
-              <a:t>80</a:t>
+              <a:t>73</a:t>
             </a:r>
           </a:p>
         </p:txBody>
@@ -10263,7 +10932,7 @@
                   <a:srgbClr val="FFFFFF"/>
                 </a:solidFill>
               </a:rPr>
-              <a:t>Key Strength: 17,000+ customers | 7 industries | Global distribution</a:t>
+              <a:t>Key Strength: Strong physical automation; CNC, casting, 3 plant locations</a:t>
             </a:r>
           </a:p>
         </p:txBody>
@@ -10340,7 +11009,7 @@
                   <a:srgbClr val="FFFFFF"/>
                 </a:solidFill>
               </a:rPr>
-              <a:t>Risk: Revenue growth 4% vs industry CAGR 6.9%</a:t>
+              <a:t>Risk: No ERP/MES/SCM platform or I4.0 certification evidenced publicly</a:t>
             </a:r>
           </a:p>
         </p:txBody>
@@ -10378,7 +11047,7 @@
             <a:avLst/>
           </a:prstGeom>
           <a:solidFill>
-            <a:srgbClr val="00B050"/>
+            <a:srgbClr val="FFC000"/>
           </a:solidFill>
           <a:ln>
             <a:noFill/>
@@ -10435,7 +11104,7 @@
                   <a:srgbClr val="FFFFFF"/>
                 </a:solidFill>
               </a:rPr>
-              <a:t>OSC: Operations &amp; Supply Chain</a:t>
+              <a:t>SM: Sales &amp; Marketing</a:t>
             </a:r>
           </a:p>
         </p:txBody>
@@ -10469,7 +11138,7 @@
                   <a:srgbClr val="FFFFFF"/>
                 </a:solidFill>
               </a:rPr>
-              <a:t>Score: 78/100   |   Weight: 20%</a:t>
+              <a:t>Score: 55/100   |   Maturity: Siloed   |   Weight: 20%</a:t>
             </a:r>
           </a:p>
         </p:txBody>
@@ -10546,7 +11215,7 @@
                   <a:srgbClr val="FFFFFF"/>
                 </a:solidFill>
               </a:rPr>
-              <a:t>78/100</a:t>
+              <a:t>55/100</a:t>
             </a:r>
           </a:p>
         </p:txBody>
@@ -10566,7 +11235,7 @@
             <a:avLst/>
           </a:prstGeom>
           <a:solidFill>
-            <a:srgbClr val="00B050"/>
+            <a:srgbClr val="FFC000"/>
           </a:solidFill>
           <a:ln>
             <a:noFill/>
@@ -10623,7 +11292,7 @@
                   <a:srgbClr val="404040"/>
                 </a:solidFill>
               </a:rPr>
-              <a:t>70,000 sqm manufacturing facility in Coimbatore | Ahmedabad + Noida plants</a:t>
+              <a:t>Two product websites (janatics.com / janaticspneumatics.com) — functional, not digital-first</a:t>
             </a:r>
           </a:p>
         </p:txBody>
@@ -10643,7 +11312,7 @@
             <a:avLst/>
           </a:prstGeom>
           <a:solidFill>
-            <a:srgbClr val="00B050"/>
+            <a:srgbClr val="FFC000"/>
           </a:solidFill>
           <a:ln>
             <a:noFill/>
@@ -10700,7 +11369,7 @@
                   <a:srgbClr val="404040"/>
                 </a:solidFill>
               </a:rPr>
-              <a:t>3,500+ distinct SKUs — single-source supplier capability for OEMs</a:t>
+              <a:t>17,000+ customers across 7 industries — managed at scale; CRM tool undisclosed</a:t>
             </a:r>
           </a:p>
         </p:txBody>
@@ -10720,7 +11389,7 @@
             <a:avLst/>
           </a:prstGeom>
           <a:solidFill>
-            <a:srgbClr val="00B050"/>
+            <a:srgbClr val="FFC000"/>
           </a:solidFill>
           <a:ln>
             <a:noFill/>
@@ -10777,7 +11446,7 @@
                   <a:srgbClr val="404040"/>
                 </a:solidFill>
               </a:rPr>
-              <a:t>Advanced CNC machining, casting, surface treatment infrastructure</a:t>
+              <a:t>No B2B e-commerce, digital ordering portal, or online pricing identified</a:t>
             </a:r>
           </a:p>
         </p:txBody>
@@ -10797,7 +11466,7 @@
             <a:avLst/>
           </a:prstGeom>
           <a:solidFill>
-            <a:srgbClr val="00B050"/>
+            <a:srgbClr val="FFC000"/>
           </a:solidFill>
           <a:ln>
             <a:noFill/>
@@ -10854,7 +11523,7 @@
                   <a:srgbClr val="404040"/>
                 </a:solidFill>
               </a:rPr>
-              <a:t>DSIR-recognized R&amp;D — proprietary product development capability</a:t>
+              <a:t>Limited LinkedIn / social media engagement signals from public sources</a:t>
             </a:r>
           </a:p>
         </p:txBody>
@@ -10874,7 +11543,7 @@
             <a:avLst/>
           </a:prstGeom>
           <a:solidFill>
-            <a:srgbClr val="00B050"/>
+            <a:srgbClr val="FFC000"/>
           </a:solidFill>
           <a:ln>
             <a:noFill/>
@@ -10931,7 +11600,7 @@
                   <a:srgbClr val="404040"/>
                 </a:solidFill>
               </a:rPr>
-              <a:t>Expanding into electric actuators, sensors, robotic systems</a:t>
+              <a:t>No paid digital marketing, content strategy, or SEO investment evidenced</a:t>
             </a:r>
           </a:p>
         </p:txBody>
@@ -10951,7 +11620,7 @@
             <a:avLst/>
           </a:prstGeom>
           <a:solidFill>
-            <a:srgbClr val="00B050"/>
+            <a:srgbClr val="FFC000"/>
           </a:solidFill>
           <a:ln>
             <a:noFill/>
@@ -11008,7 +11677,7 @@
                   <a:srgbClr val="404040"/>
                 </a:solidFill>
               </a:rPr>
-              <a:t>Internal digitization (ERP, MES) not publicly disclosed</a:t>
+              <a:t>200 global distribution partners — relationship-driven, not channel-digital</a:t>
             </a:r>
           </a:p>
         </p:txBody>
@@ -11119,7 +11788,7 @@
                   <a:srgbClr val="1F3864"/>
                 </a:solidFill>
               </a:rPr>
-              <a:t>OSC01 Scale</a:t>
+              <a:t>SM01 Digital Presence</a:t>
             </a:r>
           </a:p>
         </p:txBody>
@@ -11176,13 +11845,13 @@
         <p:spPr>
           <a:xfrm>
             <a:off x="9921239" y="1527048"/>
-            <a:ext cx="1399032" cy="256032"/>
-          </a:xfrm>
-          <a:prstGeom prst="rect">
-            <a:avLst/>
-          </a:prstGeom>
-          <a:solidFill>
-            <a:srgbClr val="00B050"/>
+            <a:ext cx="987552" cy="256032"/>
+          </a:xfrm>
+          <a:prstGeom prst="rect">
+            <a:avLst/>
+          </a:prstGeom>
+          <a:solidFill>
+            <a:srgbClr val="FFC000"/>
           </a:solidFill>
           <a:ln>
             <a:noFill/>
@@ -11236,10 +11905,10 @@
             <a:r>
               <a:rPr sz="900" b="1" i="0">
                 <a:solidFill>
-                  <a:srgbClr val="00B050"/>
-                </a:solidFill>
-              </a:rPr>
-              <a:t>85</a:t>
+                  <a:srgbClr val="FFC000"/>
+                </a:solidFill>
+              </a:rPr>
+              <a:t>60</a:t>
             </a:r>
           </a:p>
         </p:txBody>
@@ -11273,7 +11942,7 @@
                   <a:srgbClr val="1F3864"/>
                 </a:solidFill>
               </a:rPr>
-              <a:t>OSC02 Products</a:t>
+              <a:t>SM02 Social Media</a:t>
             </a:r>
           </a:p>
         </p:txBody>
@@ -11330,13 +11999,13 @@
         <p:spPr>
           <a:xfrm>
             <a:off x="9921239" y="2121408"/>
-            <a:ext cx="1481328" cy="256032"/>
-          </a:xfrm>
-          <a:prstGeom prst="rect">
-            <a:avLst/>
-          </a:prstGeom>
-          <a:solidFill>
-            <a:srgbClr val="00B050"/>
+            <a:ext cx="658368" cy="256032"/>
+          </a:xfrm>
+          <a:prstGeom prst="rect">
+            <a:avLst/>
+          </a:prstGeom>
+          <a:solidFill>
+            <a:srgbClr val="FFC000"/>
           </a:solidFill>
           <a:ln>
             <a:noFill/>
@@ -11390,10 +12059,10 @@
             <a:r>
               <a:rPr sz="900" b="1" i="0">
                 <a:solidFill>
-                  <a:srgbClr val="00B050"/>
-                </a:solidFill>
-              </a:rPr>
-              <a:t>90</a:t>
+                  <a:srgbClr val="FFC000"/>
+                </a:solidFill>
+              </a:rPr>
+              <a:t>40</a:t>
             </a:r>
           </a:p>
         </p:txBody>
@@ -11427,7 +12096,7 @@
                   <a:srgbClr val="1F3864"/>
                 </a:solidFill>
               </a:rPr>
-              <a:t>OSC03 R&amp;D</a:t>
+              <a:t>SM03 E-commerce</a:t>
             </a:r>
           </a:p>
         </p:txBody>
@@ -11484,13 +12153,13 @@
         <p:spPr>
           <a:xfrm>
             <a:off x="9921239" y="2715768"/>
-            <a:ext cx="1349654" cy="256032"/>
-          </a:xfrm>
-          <a:prstGeom prst="rect">
-            <a:avLst/>
-          </a:prstGeom>
-          <a:solidFill>
-            <a:srgbClr val="00B050"/>
+            <a:ext cx="740664" cy="256032"/>
+          </a:xfrm>
+          <a:prstGeom prst="rect">
+            <a:avLst/>
+          </a:prstGeom>
+          <a:solidFill>
+            <a:srgbClr val="FFC000"/>
           </a:solidFill>
           <a:ln>
             <a:noFill/>
@@ -11544,10 +12213,10 @@
             <a:r>
               <a:rPr sz="900" b="1" i="0">
                 <a:solidFill>
-                  <a:srgbClr val="00B050"/>
-                </a:solidFill>
-              </a:rPr>
-              <a:t>82</a:t>
+                  <a:srgbClr val="FFC000"/>
+                </a:solidFill>
+              </a:rPr>
+              <a:t>45</a:t>
             </a:r>
           </a:p>
         </p:txBody>
@@ -11581,7 +12250,7 @@
                   <a:srgbClr val="1F3864"/>
                 </a:solidFill>
               </a:rPr>
-              <a:t>OSC04 GST</a:t>
+              <a:t>SM04 Digital Marketing</a:t>
             </a:r>
           </a:p>
         </p:txBody>
@@ -11638,7 +12307,7 @@
         <p:spPr>
           <a:xfrm>
             <a:off x="9921239" y="3310128"/>
-            <a:ext cx="1185062" cy="256032"/>
+            <a:ext cx="905256" cy="256032"/>
           </a:xfrm>
           <a:prstGeom prst="rect">
             <a:avLst/>
@@ -11701,7 +12370,7 @@
                   <a:srgbClr val="FFC000"/>
                 </a:solidFill>
               </a:rPr>
-              <a:t>72</a:t>
+              <a:t>55</a:t>
             </a:r>
           </a:p>
         </p:txBody>
@@ -11735,7 +12404,7 @@
                   <a:srgbClr val="1F3864"/>
                 </a:solidFill>
               </a:rPr>
-              <a:t>OSC05 Digital</a:t>
+              <a:t>SM05 CRM / Data</a:t>
             </a:r>
           </a:p>
         </p:txBody>
@@ -11792,13 +12461,13 @@
         <p:spPr>
           <a:xfrm>
             <a:off x="9921239" y="3904488"/>
-            <a:ext cx="1069848" cy="256032"/>
-          </a:xfrm>
-          <a:prstGeom prst="rect">
-            <a:avLst/>
-          </a:prstGeom>
-          <a:solidFill>
-            <a:srgbClr val="FFC000"/>
+            <a:ext cx="1234440" cy="256032"/>
+          </a:xfrm>
+          <a:prstGeom prst="rect">
+            <a:avLst/>
+          </a:prstGeom>
+          <a:solidFill>
+            <a:srgbClr val="00B050"/>
           </a:solidFill>
           <a:ln>
             <a:noFill/>
@@ -11852,10 +12521,10 @@
             <a:r>
               <a:rPr sz="900" b="1" i="0">
                 <a:solidFill>
-                  <a:srgbClr val="FFC000"/>
-                </a:solidFill>
-              </a:rPr>
-              <a:t>65</a:t>
+                  <a:srgbClr val="00B050"/>
+                </a:solidFill>
+              </a:rPr>
+              <a:t>75</a:t>
             </a:r>
           </a:p>
         </p:txBody>
@@ -11932,7 +12601,7 @@
                   <a:srgbClr val="FFFFFF"/>
                 </a:solidFill>
               </a:rPr>
-              <a:t>Key Strength: 3,500+ SKUs | 70,000 sqm plant | DSIR R&amp;D</a:t>
+              <a:t>Key Strength: 17,000+ customers managed; CRM implied at scale</a:t>
             </a:r>
           </a:p>
         </p:txBody>
@@ -12009,7 +12678,7 @@
                   <a:srgbClr val="FFFFFF"/>
                 </a:solidFill>
               </a:rPr>
-              <a:t>Risk: Supply chain digitization level undisclosed</a:t>
+              <a:t>Risk: No digital sales channel, e-commerce, or social marketing strategy</a:t>
             </a:r>
           </a:p>
         </p:txBody>
@@ -12047,7 +12716,7 @@
             <a:avLst/>
           </a:prstGeom>
           <a:solidFill>
-            <a:srgbClr val="FFC000"/>
+            <a:srgbClr val="00B050"/>
           </a:solidFill>
           <a:ln>
             <a:noFill/>
@@ -12104,7 +12773,7 @@
                   <a:srgbClr val="FFFFFF"/>
                 </a:solidFill>
               </a:rPr>
-              <a:t>FIN: Finance</a:t>
+              <a:t>TA: Technology Adoption</a:t>
             </a:r>
           </a:p>
         </p:txBody>
@@ -12138,7 +12807,7 @@
                   <a:srgbClr val="FFFFFF"/>
                 </a:solidFill>
               </a:rPr>
-              <a:t>Score: 67/100   |   Weight: 25%</a:t>
+              <a:t>Score: 70/100   |   Maturity: Strategic   |   Weight: 20%</a:t>
             </a:r>
           </a:p>
         </p:txBody>
@@ -12215,7 +12884,7 @@
                   <a:srgbClr val="FFFFFF"/>
                 </a:solidFill>
               </a:rPr>
-              <a:t>67/100</a:t>
+              <a:t>70/100</a:t>
             </a:r>
           </a:p>
         </p:txBody>
@@ -12235,7 +12904,7 @@
             <a:avLst/>
           </a:prstGeom>
           <a:solidFill>
-            <a:srgbClr val="FFC000"/>
+            <a:srgbClr val="00B050"/>
           </a:solidFill>
           <a:ln>
             <a:noFill/>
@@ -12292,7 +12961,7 @@
                   <a:srgbClr val="404040"/>
                 </a:solidFill>
               </a:rPr>
-              <a:t>FY2025 Revenue: ₹531 Cr | Employee productivity: ₹80L per employee</a:t>
+              <a:t>DSIR R&amp;D developing robotic systems, IoT sensors, electric actuators — strong product R&amp;D</a:t>
             </a:r>
           </a:p>
         </p:txBody>
@@ -12312,7 +12981,7 @@
             <a:avLst/>
           </a:prstGeom>
           <a:solidFill>
-            <a:srgbClr val="FFC000"/>
+            <a:srgbClr val="00B050"/>
           </a:solidFill>
           <a:ln>
             <a:noFill/>
@@ -12369,7 +13038,7 @@
                   <a:srgbClr val="404040"/>
                 </a:solidFill>
               </a:rPr>
-              <a:t>ICRA-rated | Stable outlook | Multiple reaffirmations (2021–2025)</a:t>
+              <a:t>Industry 4.0 didactic product line — smart manufacturing expertise in products</a:t>
             </a:r>
           </a:p>
         </p:txBody>
@@ -12389,7 +13058,7 @@
             <a:avLst/>
           </a:prstGeom>
           <a:solidFill>
-            <a:srgbClr val="FFC000"/>
+            <a:srgbClr val="00B050"/>
           </a:solidFill>
           <a:ln>
             <a:noFill/>
@@ -12446,7 +13115,7 @@
                   <a:srgbClr val="404040"/>
                 </a:solidFill>
               </a:rPr>
-              <a:t>Paid-up capital ₹26.5 Cr | Authorized ₹30 Cr | Self-funded growth</a:t>
+              <a:t>Website infrastructure functional; no modern CMS, API layer, or customer portal</a:t>
             </a:r>
           </a:p>
         </p:txBody>
@@ -12466,7 +13135,7 @@
             <a:avLst/>
           </a:prstGeom>
           <a:solidFill>
-            <a:srgbClr val="FFC000"/>
+            <a:srgbClr val="00B050"/>
           </a:solidFill>
           <a:ln>
             <a:noFill/>
@@ -12523,7 +13192,7 @@
                   <a:srgbClr val="404040"/>
                 </a:solidFill>
               </a:rPr>
-              <a:t>Revenue growth 4% YoY — steady but below inflation-adjusted peer level</a:t>
+              <a:t>No cloud migration, SaaS adoption, or digital collaboration tools disclosed</a:t>
             </a:r>
           </a:p>
         </p:txBody>
@@ -12543,7 +13212,7 @@
             <a:avLst/>
           </a:prstGeom>
           <a:solidFill>
-            <a:srgbClr val="FFC000"/>
+            <a:srgbClr val="00B050"/>
           </a:solidFill>
           <a:ln>
             <a:noFill/>
@@ -12600,7 +13269,7 @@
                   <a:srgbClr val="404040"/>
                 </a:solidFill>
               </a:rPr>
-              <a:t>EBITDA CAGR -22% (1-yr, Tracxn) — margin compression flagged</a:t>
+              <a:t>Cybersecurity: ICRA-compliant; no ISO 27001 or public data policy found</a:t>
             </a:r>
           </a:p>
         </p:txBody>
@@ -12620,7 +13289,7 @@
             <a:avLst/>
           </a:prstGeom>
           <a:solidFill>
-            <a:srgbClr val="FFC000"/>
+            <a:srgbClr val="00B050"/>
           </a:solidFill>
           <a:ln>
             <a:noFill/>
@@ -12677,7 +13346,7 @@
                   <a:srgbClr val="404040"/>
                 </a:solidFill>
               </a:rPr>
-              <a:t>Full P&amp;L not public (unlisted Pvt Ltd) — ICRA rationale is key proxy</a:t>
+              <a:t>Largest gap: internal tech infrastructure lags product-layer digital maturity</a:t>
             </a:r>
           </a:p>
         </p:txBody>
@@ -12788,7 +13457,7 @@
                   <a:srgbClr val="1F3864"/>
                 </a:solidFill>
               </a:rPr>
-              <a:t>FIN01 Revenue</a:t>
+              <a:t>TA01 Digital Infra</a:t>
             </a:r>
           </a:p>
         </p:txBody>
@@ -12845,13 +13514,13 @@
         <p:spPr>
           <a:xfrm>
             <a:off x="9921239" y="1527048"/>
-            <a:ext cx="1316736" cy="256032"/>
-          </a:xfrm>
-          <a:prstGeom prst="rect">
-            <a:avLst/>
-          </a:prstGeom>
-          <a:solidFill>
-            <a:srgbClr val="00B050"/>
+            <a:ext cx="1069848" cy="256032"/>
+          </a:xfrm>
+          <a:prstGeom prst="rect">
+            <a:avLst/>
+          </a:prstGeom>
+          <a:solidFill>
+            <a:srgbClr val="FFC000"/>
           </a:solidFill>
           <a:ln>
             <a:noFill/>
@@ -12905,10 +13574,10 @@
             <a:r>
               <a:rPr sz="900" b="1" i="0">
                 <a:solidFill>
-                  <a:srgbClr val="00B050"/>
-                </a:solidFill>
-              </a:rPr>
-              <a:t>80</a:t>
+                  <a:srgbClr val="FFC000"/>
+                </a:solidFill>
+              </a:rPr>
+              <a:t>65</a:t>
             </a:r>
           </a:p>
         </p:txBody>
@@ -12942,7 +13611,7 @@
                   <a:srgbClr val="1F3864"/>
                 </a:solidFill>
               </a:rPr>
-              <a:t>FIN02 Growth</a:t>
+              <a:t>TA02 IoT Products</a:t>
             </a:r>
           </a:p>
         </p:txBody>
@@ -12999,13 +13668,13 @@
         <p:spPr>
           <a:xfrm>
             <a:off x="9921239" y="2121408"/>
-            <a:ext cx="905256" cy="256032"/>
-          </a:xfrm>
-          <a:prstGeom prst="rect">
-            <a:avLst/>
-          </a:prstGeom>
-          <a:solidFill>
-            <a:srgbClr val="FFC000"/>
+            <a:ext cx="1316736" cy="256032"/>
+          </a:xfrm>
+          <a:prstGeom prst="rect">
+            <a:avLst/>
+          </a:prstGeom>
+          <a:solidFill>
+            <a:srgbClr val="00B050"/>
           </a:solidFill>
           <a:ln>
             <a:noFill/>
@@ -13059,10 +13728,10 @@
             <a:r>
               <a:rPr sz="900" b="1" i="0">
                 <a:solidFill>
-                  <a:srgbClr val="FFC000"/>
-                </a:solidFill>
-              </a:rPr>
-              <a:t>55</a:t>
+                  <a:srgbClr val="00B050"/>
+                </a:solidFill>
+              </a:rPr>
+              <a:t>80</a:t>
             </a:r>
           </a:p>
         </p:txBody>
@@ -13096,7 +13765,7 @@
                   <a:srgbClr val="1F3864"/>
                 </a:solidFill>
               </a:rPr>
-              <a:t>FIN03 EBITDA</a:t>
+              <a:t>TA03 Cloud/SaaS</a:t>
             </a:r>
           </a:p>
         </p:txBody>
@@ -13153,13 +13822,13 @@
         <p:spPr>
           <a:xfrm>
             <a:off x="9921239" y="2715768"/>
-            <a:ext cx="691286" cy="256032"/>
-          </a:xfrm>
-          <a:prstGeom prst="rect">
-            <a:avLst/>
-          </a:prstGeom>
-          <a:solidFill>
-            <a:srgbClr val="FF0000"/>
+            <a:ext cx="987552" cy="256032"/>
+          </a:xfrm>
+          <a:prstGeom prst="rect">
+            <a:avLst/>
+          </a:prstGeom>
+          <a:solidFill>
+            <a:srgbClr val="FFC000"/>
           </a:solidFill>
           <a:ln>
             <a:noFill/>
@@ -13213,10 +13882,10 @@
             <a:r>
               <a:rPr sz="900" b="1" i="0">
                 <a:solidFill>
-                  <a:srgbClr val="FF0000"/>
-                </a:solidFill>
-              </a:rPr>
-              <a:t>42</a:t>
+                  <a:srgbClr val="FFC000"/>
+                </a:solidFill>
+              </a:rPr>
+              <a:t>60</a:t>
             </a:r>
           </a:p>
         </p:txBody>
@@ -13250,7 +13919,7 @@
                   <a:srgbClr val="1F3864"/>
                 </a:solidFill>
               </a:rPr>
-              <a:t>FIN04 Credit</a:t>
+              <a:t>TA04 R&amp;D Digital</a:t>
             </a:r>
           </a:p>
         </p:txBody>
@@ -13307,7 +13976,7 @@
         <p:spPr>
           <a:xfrm>
             <a:off x="9921239" y="3310128"/>
-            <a:ext cx="1349654" cy="256032"/>
+            <a:ext cx="1283817" cy="256032"/>
           </a:xfrm>
           <a:prstGeom prst="rect">
             <a:avLst/>
@@ -13370,7 +14039,7 @@
                   <a:srgbClr val="00B050"/>
                 </a:solidFill>
               </a:rPr>
-              <a:t>82</a:t>
+              <a:t>78</a:t>
             </a:r>
           </a:p>
         </p:txBody>
@@ -13404,7 +14073,7 @@
                   <a:srgbClr val="1F3864"/>
                 </a:solidFill>
               </a:rPr>
-              <a:t>FIN05 Capital</a:t>
+              <a:t>TA05 Cybersecurity</a:t>
             </a:r>
           </a:p>
         </p:txBody>
@@ -13461,7 +14130,7 @@
         <p:spPr>
           <a:xfrm>
             <a:off x="9921239" y="3904488"/>
-            <a:ext cx="1234440" cy="256032"/>
+            <a:ext cx="1102766" cy="256032"/>
           </a:xfrm>
           <a:prstGeom prst="rect">
             <a:avLst/>
@@ -13524,168 +14193,14 @@
                   <a:srgbClr val="00B050"/>
                 </a:solidFill>
               </a:rPr>
-              <a:t>75</a:t>
-            </a:r>
-          </a:p>
-        </p:txBody>
-      </p:sp>
-      <p:sp>
-        <p:nvSpPr>
-          <p:cNvPr id="41" name="TextBox 40"/>
-          <p:cNvSpPr txBox="1"/>
-          <p:nvPr/>
-        </p:nvSpPr>
-        <p:spPr>
-          <a:xfrm>
-            <a:off x="8046720" y="4389120"/>
-            <a:ext cx="1828800" cy="475488"/>
-          </a:xfrm>
-          <a:prstGeom prst="rect">
-            <a:avLst/>
-          </a:prstGeom>
-          <a:noFill/>
-        </p:spPr>
-        <p:txBody>
-          <a:bodyPr wrap="square">
-            <a:spAutoFit/>
-          </a:bodyPr>
-          <a:lstStyle/>
-          <a:p>
-            <a:pPr algn="l"/>
-            <a:r>
-              <a:rPr sz="900" b="0" i="0">
-                <a:solidFill>
-                  <a:srgbClr val="1F3864"/>
-                </a:solidFill>
-              </a:rPr>
-              <a:t>FIN06 Productivity</a:t>
-            </a:r>
-          </a:p>
-        </p:txBody>
-      </p:sp>
-      <p:sp>
-        <p:nvSpPr>
-          <p:cNvPr id="42" name="Rectangle 41"/>
-          <p:cNvSpPr/>
-          <p:nvPr/>
-        </p:nvSpPr>
-        <p:spPr>
-          <a:xfrm>
-            <a:off x="9921239" y="4498848"/>
-            <a:ext cx="1645920" cy="256032"/>
-          </a:xfrm>
-          <a:prstGeom prst="rect">
-            <a:avLst/>
-          </a:prstGeom>
-          <a:solidFill>
-            <a:srgbClr val="D6E4F0"/>
-          </a:solidFill>
-          <a:ln>
-            <a:noFill/>
-          </a:ln>
-        </p:spPr>
-        <p:style>
-          <a:lnRef idx="1">
-            <a:schemeClr val="accent1"/>
-          </a:lnRef>
-          <a:fillRef idx="3">
-            <a:schemeClr val="accent1"/>
-          </a:fillRef>
-          <a:effectRef idx="2">
-            <a:schemeClr val="accent1"/>
-          </a:effectRef>
-          <a:fontRef idx="minor">
-            <a:schemeClr val="lt1"/>
-          </a:fontRef>
-        </p:style>
-        <p:txBody>
-          <a:bodyPr rtlCol="0" anchor="ctr"/>
-          <a:lstStyle/>
-          <a:p>
-            <a:pPr algn="ctr"/>
-          </a:p>
-        </p:txBody>
-      </p:sp>
-      <p:sp>
-        <p:nvSpPr>
-          <p:cNvPr id="43" name="Rectangle 42"/>
-          <p:cNvSpPr/>
-          <p:nvPr/>
-        </p:nvSpPr>
-        <p:spPr>
-          <a:xfrm>
-            <a:off x="9921239" y="4498848"/>
-            <a:ext cx="1152144" cy="256032"/>
-          </a:xfrm>
-          <a:prstGeom prst="rect">
-            <a:avLst/>
-          </a:prstGeom>
-          <a:solidFill>
-            <a:srgbClr val="FFC000"/>
-          </a:solidFill>
-          <a:ln>
-            <a:noFill/>
-          </a:ln>
-        </p:spPr>
-        <p:style>
-          <a:lnRef idx="1">
-            <a:schemeClr val="accent1"/>
-          </a:lnRef>
-          <a:fillRef idx="3">
-            <a:schemeClr val="accent1"/>
-          </a:fillRef>
-          <a:effectRef idx="2">
-            <a:schemeClr val="accent1"/>
-          </a:effectRef>
-          <a:fontRef idx="minor">
-            <a:schemeClr val="lt1"/>
-          </a:fontRef>
-        </p:style>
-        <p:txBody>
-          <a:bodyPr rtlCol="0" anchor="ctr"/>
-          <a:lstStyle/>
-          <a:p>
-            <a:pPr algn="ctr"/>
-          </a:p>
-        </p:txBody>
-      </p:sp>
-      <p:sp>
-        <p:nvSpPr>
-          <p:cNvPr id="44" name="TextBox 43"/>
-          <p:cNvSpPr txBox="1"/>
-          <p:nvPr/>
-        </p:nvSpPr>
-        <p:spPr>
-          <a:xfrm>
-            <a:off x="11612880" y="4389120"/>
-            <a:ext cx="365760" cy="475488"/>
-          </a:xfrm>
-          <a:prstGeom prst="rect">
-            <a:avLst/>
-          </a:prstGeom>
-          <a:noFill/>
-        </p:spPr>
-        <p:txBody>
-          <a:bodyPr wrap="square">
-            <a:spAutoFit/>
-          </a:bodyPr>
-          <a:lstStyle/>
-          <a:p>
-            <a:pPr algn="l"/>
-            <a:r>
-              <a:rPr sz="900" b="1" i="0">
-                <a:solidFill>
-                  <a:srgbClr val="FFC000"/>
-                </a:solidFill>
-              </a:rPr>
-              <a:t>70</a:t>
-            </a:r>
-          </a:p>
-        </p:txBody>
-      </p:sp>
-      <p:sp>
-        <p:nvSpPr>
-          <p:cNvPr id="45" name="Rectangle 44"/>
+              <a:t>67</a:t>
+            </a:r>
+          </a:p>
+        </p:txBody>
+      </p:sp>
+      <p:sp>
+        <p:nvSpPr>
+          <p:cNvPr id="41" name="Rectangle 40"/>
           <p:cNvSpPr/>
           <p:nvPr/>
         </p:nvSpPr>
@@ -13728,7 +14243,7 @@
       </p:sp>
       <p:sp>
         <p:nvSpPr>
-          <p:cNvPr id="46" name="TextBox 45"/>
+          <p:cNvPr id="42" name="TextBox 41"/>
           <p:cNvSpPr txBox="1"/>
           <p:nvPr/>
         </p:nvSpPr>
@@ -13755,14 +14270,14 @@
                   <a:srgbClr val="FFFFFF"/>
                 </a:solidFill>
               </a:rPr>
-              <a:t>Key Strength: ICRA Stable | ₹531 Cr revenue | Self-funded</a:t>
-            </a:r>
-          </a:p>
-        </p:txBody>
-      </p:sp>
-      <p:sp>
-        <p:nvSpPr>
-          <p:cNvPr id="47" name="Rectangle 46"/>
+              <a:t>Key Strength: IoT product R&amp;D (80/100) — DSIR-backed, robotic and sensor development</a:t>
+            </a:r>
+          </a:p>
+        </p:txBody>
+      </p:sp>
+      <p:sp>
+        <p:nvSpPr>
+          <p:cNvPr id="43" name="Rectangle 42"/>
           <p:cNvSpPr/>
           <p:nvPr/>
         </p:nvSpPr>
@@ -13805,7 +14320,7 @@
       </p:sp>
       <p:sp>
         <p:nvSpPr>
-          <p:cNvPr id="48" name="TextBox 47"/>
+          <p:cNvPr id="44" name="TextBox 43"/>
           <p:cNvSpPr txBox="1"/>
           <p:nvPr/>
         </p:nvSpPr>
@@ -13832,7 +14347,7 @@
                   <a:srgbClr val="FFFFFF"/>
                 </a:solidFill>
               </a:rPr>
-              <a:t>Risk: EBITDA CAGR -22% (FY25) — needs full P&amp;L for confirmation</a:t>
+              <a:t>Risk: Internal cloud/SaaS adoption and cybersecurity framework not evidenced</a:t>
             </a:r>
           </a:p>
         </p:txBody>
@@ -13870,7 +14385,7 @@
             <a:avLst/>
           </a:prstGeom>
           <a:solidFill>
-            <a:srgbClr val="00B050"/>
+            <a:srgbClr val="FFC000"/>
           </a:solidFill>
           <a:ln>
             <a:noFill/>
@@ -13927,7 +14442,7 @@
                   <a:srgbClr val="FFFFFF"/>
                 </a:solidFill>
               </a:rPr>
-              <a:t>IC: Industry Context</a:t>
+              <a:t>SC: Skills &amp; Capabilities</a:t>
             </a:r>
           </a:p>
         </p:txBody>
@@ -13961,7 +14476,7 @@
                   <a:srgbClr val="FFFFFF"/>
                 </a:solidFill>
               </a:rPr>
-              <a:t>Score: 75/100   |   Weight: 10%</a:t>
+              <a:t>Score: 60/100   |   Maturity: Siloed   |   Weight: 20%</a:t>
             </a:r>
           </a:p>
         </p:txBody>
@@ -14038,7 +14553,7 @@
                   <a:srgbClr val="FFFFFF"/>
                 </a:solidFill>
               </a:rPr>
-              <a:t>75/100</a:t>
+              <a:t>60/100</a:t>
             </a:r>
           </a:p>
         </p:txBody>
@@ -14058,7 +14573,7 @@
             <a:avLst/>
           </a:prstGeom>
           <a:solidFill>
-            <a:srgbClr val="00B050"/>
+            <a:srgbClr val="FFC000"/>
           </a:solidFill>
           <a:ln>
             <a:noFill/>
@@ -14115,7 +14630,7 @@
                   <a:srgbClr val="404040"/>
                 </a:solidFill>
               </a:rPr>
-              <a:t>India pneumatics market: $1.06B (2024) → $1.94B (2033) | CAGR 6.9%</a:t>
+              <a:t>662 employees — engineering-deep workforce; strong CNC and automation specialists</a:t>
             </a:r>
           </a:p>
         </p:txBody>
@@ -14135,7 +14650,7 @@
             <a:avLst/>
           </a:prstGeom>
           <a:solidFill>
-            <a:srgbClr val="00B050"/>
+            <a:srgbClr val="FFC000"/>
           </a:solidFill>
           <a:ln>
             <a:noFill/>
@@ -14192,7 +14707,7 @@
                   <a:srgbClr val="404040"/>
                 </a:solidFill>
               </a:rPr>
-              <a:t>Make in India + PLI schemes driving domestic manufacturing investment</a:t>
+              <a:t>DSIR R&amp;D team in place — structured technical innovation capability</a:t>
             </a:r>
           </a:p>
         </p:txBody>
@@ -14212,7 +14727,7 @@
             <a:avLst/>
           </a:prstGeom>
           <a:solidFill>
-            <a:srgbClr val="00B050"/>
+            <a:srgbClr val="FFC000"/>
           </a:solidFill>
           <a:ln>
             <a:noFill/>
@@ -14269,7 +14784,7 @@
                   <a:srgbClr val="404040"/>
                 </a:solidFill>
               </a:rPr>
-              <a:t>China+1 sourcing strategy creating incremental export demand</a:t>
+              <a:t>Limited signals of software engineers, data scientists, or digital roles hired</a:t>
             </a:r>
           </a:p>
         </p:txBody>
@@ -14289,7 +14804,7 @@
             <a:avLst/>
           </a:prstGeom>
           <a:solidFill>
-            <a:srgbClr val="00B050"/>
+            <a:srgbClr val="FFC000"/>
           </a:solidFill>
           <a:ln>
             <a:noFill/>
@@ -14346,7 +14861,7 @@
                   <a:srgbClr val="404040"/>
                 </a:solidFill>
               </a:rPr>
-              <a:t>Janatics competes with SMC, Festo, Parker in mid-market segment</a:t>
+              <a:t>No public L&amp;D, digital upskilling, or online learning program disclosed</a:t>
             </a:r>
           </a:p>
         </p:txBody>
@@ -14366,7 +14881,7 @@
             <a:avLst/>
           </a:prstGeom>
           <a:solidFill>
-            <a:srgbClr val="00B050"/>
+            <a:srgbClr val="FFC000"/>
           </a:solidFill>
           <a:ln>
             <a:noFill/>
@@ -14423,7 +14938,7 @@
                   <a:srgbClr val="404040"/>
                 </a:solidFill>
               </a:rPr>
-              <a:t>End-market spread: pharma, auto, packaging, food, medical, textile, printing</a:t>
+              <a:t>Management I4.0 awareness evidenced by product decisions; no CDO hire signal</a:t>
             </a:r>
           </a:p>
         </p:txBody>
@@ -14443,7 +14958,7 @@
             <a:avLst/>
           </a:prstGeom>
           <a:solidFill>
-            <a:srgbClr val="00B050"/>
+            <a:srgbClr val="FFC000"/>
           </a:solidFill>
           <a:ln>
             <a:noFill/>
@@ -14500,7 +15015,7 @@
                   <a:srgbClr val="404040"/>
                 </a:solidFill>
               </a:rPr>
-              <a:t>Industry 4.0 / smart pneumatics trend aligns with Janatics product roadmap</a:t>
+              <a:t>No hackathon, innovation lab, startup engagement, or employee innovation program</a:t>
             </a:r>
           </a:p>
         </p:txBody>
@@ -14611,7 +15126,7 @@
                   <a:srgbClr val="1F3864"/>
                 </a:solidFill>
               </a:rPr>
-              <a:t>IC01 Mkt Size</a:t>
+              <a:t>SC01 Digital Talent</a:t>
             </a:r>
           </a:p>
         </p:txBody>
@@ -14668,7 +15183,7 @@
         <p:spPr>
           <a:xfrm>
             <a:off x="9921239" y="1527048"/>
-            <a:ext cx="1152144" cy="256032"/>
+            <a:ext cx="905256" cy="256032"/>
           </a:xfrm>
           <a:prstGeom prst="rect">
             <a:avLst/>
@@ -14731,7 +15246,7 @@
                   <a:srgbClr val="FFC000"/>
                 </a:solidFill>
               </a:rPr>
-              <a:t>70</a:t>
+              <a:t>55</a:t>
             </a:r>
           </a:p>
         </p:txBody>
@@ -14765,7 +15280,7 @@
                   <a:srgbClr val="1F3864"/>
                 </a:solidFill>
               </a:rPr>
-              <a:t>IC02 Growth</a:t>
+              <a:t>SC02 Tech Workforce</a:t>
             </a:r>
           </a:p>
         </p:txBody>
@@ -14822,7 +15337,7 @@
         <p:spPr>
           <a:xfrm>
             <a:off x="9921239" y="2121408"/>
-            <a:ext cx="1283817" cy="256032"/>
+            <a:ext cx="1185062" cy="256032"/>
           </a:xfrm>
           <a:prstGeom prst="rect">
             <a:avLst/>
@@ -14885,7 +15400,7 @@
                   <a:srgbClr val="00B050"/>
                 </a:solidFill>
               </a:rPr>
-              <a:t>78</a:t>
+              <a:t>72</a:t>
             </a:r>
           </a:p>
         </p:txBody>
@@ -14919,7 +15434,7 @@
                   <a:srgbClr val="1F3864"/>
                 </a:solidFill>
               </a:rPr>
-              <a:t>IC03 Position</a:t>
+              <a:t>SC03 Training</a:t>
             </a:r>
           </a:p>
         </p:txBody>
@@ -14976,7 +15491,7 @@
         <p:spPr>
           <a:xfrm>
             <a:off x="9921239" y="2715768"/>
-            <a:ext cx="1152144" cy="256032"/>
+            <a:ext cx="822960" cy="256032"/>
           </a:xfrm>
           <a:prstGeom prst="rect">
             <a:avLst/>
@@ -15039,7 +15554,7 @@
                   <a:srgbClr val="FFC000"/>
                 </a:solidFill>
               </a:rPr>
-              <a:t>70</a:t>
+              <a:t>50</a:t>
             </a:r>
           </a:p>
         </p:txBody>
@@ -15073,7 +15588,7 @@
                   <a:srgbClr val="1F3864"/>
                 </a:solidFill>
               </a:rPr>
-              <a:t>IC04 Macro</a:t>
+              <a:t>SC04 Leadership DQ</a:t>
             </a:r>
           </a:p>
         </p:txBody>
@@ -15130,13 +15645,13 @@
         <p:spPr>
           <a:xfrm>
             <a:off x="9921239" y="3310128"/>
-            <a:ext cx="1349654" cy="256032"/>
-          </a:xfrm>
-          <a:prstGeom prst="rect">
-            <a:avLst/>
-          </a:prstGeom>
-          <a:solidFill>
-            <a:srgbClr val="00B050"/>
+            <a:ext cx="1069848" cy="256032"/>
+          </a:xfrm>
+          <a:prstGeom prst="rect">
+            <a:avLst/>
+          </a:prstGeom>
+          <a:solidFill>
+            <a:srgbClr val="FFC000"/>
           </a:solidFill>
           <a:ln>
             <a:noFill/>
@@ -15190,10 +15705,10 @@
             <a:r>
               <a:rPr sz="900" b="1" i="0">
                 <a:solidFill>
-                  <a:srgbClr val="00B050"/>
-                </a:solidFill>
-              </a:rPr>
-              <a:t>82</a:t>
+                  <a:srgbClr val="FFC000"/>
+                </a:solidFill>
+              </a:rPr>
+              <a:t>65</a:t>
             </a:r>
           </a:p>
         </p:txBody>
@@ -15227,7 +15742,7 @@
                   <a:srgbClr val="1F3864"/>
                 </a:solidFill>
               </a:rPr>
-              <a:t>IC05 Diversity</a:t>
+              <a:t>SC05 Innovation Culture</a:t>
             </a:r>
           </a:p>
         </p:txBody>
@@ -15284,13 +15799,13 @@
         <p:spPr>
           <a:xfrm>
             <a:off x="9921239" y="3904488"/>
-            <a:ext cx="1250899" cy="256032"/>
-          </a:xfrm>
-          <a:prstGeom prst="rect">
-            <a:avLst/>
-          </a:prstGeom>
-          <a:solidFill>
-            <a:srgbClr val="00B050"/>
+            <a:ext cx="954633" cy="256032"/>
+          </a:xfrm>
+          <a:prstGeom prst="rect">
+            <a:avLst/>
+          </a:prstGeom>
+          <a:solidFill>
+            <a:srgbClr val="FFC000"/>
           </a:solidFill>
           <a:ln>
             <a:noFill/>
@@ -15344,10 +15859,10 @@
             <a:r>
               <a:rPr sz="900" b="1" i="0">
                 <a:solidFill>
-                  <a:srgbClr val="00B050"/>
-                </a:solidFill>
-              </a:rPr>
-              <a:t>76</a:t>
+                  <a:srgbClr val="FFC000"/>
+                </a:solidFill>
+              </a:rPr>
+              <a:t>58</a:t>
             </a:r>
           </a:p>
         </p:txBody>
@@ -15424,7 +15939,7 @@
                   <a:srgbClr val="FFFFFF"/>
                 </a:solidFill>
               </a:rPr>
-              <a:t>Key Strength: 6.9% market CAGR | Make in India tailwind | 7 end-markets</a:t>
+              <a:t>Key Strength: Engineering-depth workforce; DSIR R&amp;D team in place</a:t>
             </a:r>
           </a:p>
         </p:txBody>
@@ -15501,7 +16016,7 @@
                   <a:srgbClr val="FFFFFF"/>
                 </a:solidFill>
               </a:rPr>
-              <a:t>Risk: Global competition intensifying — SMC, Festo localizing</a:t>
+              <a:t>Risk: No digital talent pipeline or upskilling program evidenced publicly</a:t>
             </a:r>
           </a:p>
         </p:txBody>
@@ -15596,7 +16111,7 @@
                   <a:srgbClr val="FFFFFF"/>
                 </a:solidFill>
               </a:rPr>
-              <a:t>Executive Recommendation</a:t>
+              <a:t>Next Best Actions — Digital Transformation Roadmap</a:t>
             </a:r>
           </a:p>
         </p:txBody>
@@ -15609,14 +16124,14 @@
         </p:nvSpPr>
         <p:spPr>
           <a:xfrm>
-            <a:off x="365760" y="1097280"/>
-            <a:ext cx="11430000" cy="640080"/>
-          </a:xfrm>
-          <a:prstGeom prst="rect">
-            <a:avLst/>
-          </a:prstGeom>
-          <a:solidFill>
-            <a:srgbClr val="00B050"/>
+            <a:off x="274320" y="1051560"/>
+            <a:ext cx="2834640" cy="384048"/>
+          </a:xfrm>
+          <a:prstGeom prst="rect">
+            <a:avLst/>
+          </a:prstGeom>
+          <a:solidFill>
+            <a:srgbClr val="FF0000"/>
           </a:solidFill>
           <a:ln>
             <a:noFill/>
@@ -15652,28 +16167,28 @@
         </p:nvSpPr>
         <p:spPr>
           <a:xfrm>
-            <a:off x="365760" y="1097280"/>
-            <a:ext cx="11430000" cy="640080"/>
-          </a:xfrm>
-          <a:prstGeom prst="rect">
-            <a:avLst/>
-          </a:prstGeom>
-          <a:noFill/>
-        </p:spPr>
-        <p:txBody>
-          <a:bodyPr wrap="square">
-            <a:spAutoFit/>
-          </a:bodyPr>
-          <a:lstStyle/>
-          <a:p>
-            <a:pPr algn="ctr"/>
-            <a:r>
-              <a:rPr sz="1300" b="1" i="0">
+            <a:off x="274320" y="1051560"/>
+            <a:ext cx="2834640" cy="384048"/>
+          </a:xfrm>
+          <a:prstGeom prst="rect">
+            <a:avLst/>
+          </a:prstGeom>
+          <a:noFill/>
+        </p:spPr>
+        <p:txBody>
+          <a:bodyPr wrap="square">
+            <a:spAutoFit/>
+          </a:bodyPr>
+          <a:lstStyle/>
+          <a:p>
+            <a:pPr algn="ctr"/>
+            <a:r>
+              <a:rPr sz="1000" b="1" i="0">
                 <a:solidFill>
                   <a:srgbClr val="FFFFFF"/>
                 </a:solidFill>
               </a:rPr>
-              <a:t>DDMR Composite Score: 75.7/100 — STRONG  |  Recommendation: Proceed with engagement</a:t>
+              <a:t>#01  HIGH</a:t>
             </a:r>
           </a:p>
         </p:txBody>
@@ -15686,8 +16201,8 @@
         </p:nvSpPr>
         <p:spPr>
           <a:xfrm>
-            <a:off x="365760" y="1920240"/>
-            <a:ext cx="2560320" cy="1005840"/>
+            <a:off x="274320" y="1463040"/>
+            <a:ext cx="2834640" cy="475488"/>
           </a:xfrm>
           <a:prstGeom prst="rect">
             <a:avLst/>
@@ -15729,8 +16244,8 @@
         </p:nvSpPr>
         <p:spPr>
           <a:xfrm>
-            <a:off x="411480" y="2011680"/>
-            <a:ext cx="2468880" cy="822960"/>
+            <a:off x="320040" y="1481328"/>
+            <a:ext cx="2743200" cy="438912"/>
           </a:xfrm>
           <a:prstGeom prst="rect">
             <a:avLst/>
@@ -15745,26 +16260,719 @@
           <a:p>
             <a:pPr algn="l"/>
             <a:r>
+              <a:rPr sz="1100" b="1" i="0">
+                <a:solidFill>
+                  <a:srgbClr val="FFFFFF"/>
+                </a:solidFill>
+              </a:rPr>
+              <a:t>Activate B2B Digital Sales Channel</a:t>
+            </a:r>
+          </a:p>
+        </p:txBody>
+      </p:sp>
+      <p:sp>
+        <p:nvSpPr>
+          <p:cNvPr id="8" name="Rectangle 7"/>
+          <p:cNvSpPr/>
+          <p:nvPr/>
+        </p:nvSpPr>
+        <p:spPr>
+          <a:xfrm>
+            <a:off x="274320" y="1965960"/>
+            <a:ext cx="2834640" cy="292608"/>
+          </a:xfrm>
+          <a:prstGeom prst="rect">
+            <a:avLst/>
+          </a:prstGeom>
+          <a:solidFill>
+            <a:srgbClr val="D6E4F0"/>
+          </a:solidFill>
+          <a:ln>
+            <a:noFill/>
+          </a:ln>
+        </p:spPr>
+        <p:style>
+          <a:lnRef idx="1">
+            <a:schemeClr val="accent1"/>
+          </a:lnRef>
+          <a:fillRef idx="3">
+            <a:schemeClr val="accent1"/>
+          </a:fillRef>
+          <a:effectRef idx="2">
+            <a:schemeClr val="accent1"/>
+          </a:effectRef>
+          <a:fontRef idx="minor">
+            <a:schemeClr val="lt1"/>
+          </a:fontRef>
+        </p:style>
+        <p:txBody>
+          <a:bodyPr rtlCol="0" anchor="ctr"/>
+          <a:lstStyle/>
+          <a:p>
+            <a:pPr algn="ctr"/>
+          </a:p>
+        </p:txBody>
+      </p:sp>
+      <p:sp>
+        <p:nvSpPr>
+          <p:cNvPr id="9" name="TextBox 8"/>
+          <p:cNvSpPr txBox="1"/>
+          <p:nvPr/>
+        </p:nvSpPr>
+        <p:spPr>
+          <a:xfrm>
+            <a:off x="320040" y="1975104"/>
+            <a:ext cx="2743200" cy="274320"/>
+          </a:xfrm>
+          <a:prstGeom prst="rect">
+            <a:avLst/>
+          </a:prstGeom>
+          <a:noFill/>
+        </p:spPr>
+        <p:txBody>
+          <a:bodyPr wrap="square">
+            <a:spAutoFit/>
+          </a:bodyPr>
+          <a:lstStyle/>
+          <a:p>
+            <a:pPr algn="l"/>
+            <a:r>
+              <a:rPr sz="800" b="1" i="0">
+                <a:solidFill>
+                  <a:srgbClr val="1F3864"/>
+                </a:solidFill>
+              </a:rPr>
+              <a:t>Gap: SM03: 45/100</a:t>
+            </a:r>
+          </a:p>
+        </p:txBody>
+      </p:sp>
+      <p:sp>
+        <p:nvSpPr>
+          <p:cNvPr id="10" name="Rectangle 9"/>
+          <p:cNvSpPr/>
+          <p:nvPr/>
+        </p:nvSpPr>
+        <p:spPr>
+          <a:xfrm>
+            <a:off x="274320" y="2286000"/>
+            <a:ext cx="2834640" cy="274320"/>
+          </a:xfrm>
+          <a:prstGeom prst="rect">
+            <a:avLst/>
+          </a:prstGeom>
+          <a:solidFill>
+            <a:srgbClr val="FF0000"/>
+          </a:solidFill>
+          <a:ln>
+            <a:noFill/>
+          </a:ln>
+        </p:spPr>
+        <p:style>
+          <a:lnRef idx="1">
+            <a:schemeClr val="accent1"/>
+          </a:lnRef>
+          <a:fillRef idx="3">
+            <a:schemeClr val="accent1"/>
+          </a:fillRef>
+          <a:effectRef idx="2">
+            <a:schemeClr val="accent1"/>
+          </a:effectRef>
+          <a:fontRef idx="minor">
+            <a:schemeClr val="lt1"/>
+          </a:fontRef>
+        </p:style>
+        <p:txBody>
+          <a:bodyPr rtlCol="0" anchor="ctr"/>
+          <a:lstStyle/>
+          <a:p>
+            <a:pPr algn="ctr"/>
+          </a:p>
+        </p:txBody>
+      </p:sp>
+      <p:sp>
+        <p:nvSpPr>
+          <p:cNvPr id="11" name="TextBox 10"/>
+          <p:cNvSpPr txBox="1"/>
+          <p:nvPr/>
+        </p:nvSpPr>
+        <p:spPr>
+          <a:xfrm>
+            <a:off x="320040" y="2286000"/>
+            <a:ext cx="2834640" cy="274320"/>
+          </a:xfrm>
+          <a:prstGeom prst="rect">
+            <a:avLst/>
+          </a:prstGeom>
+          <a:noFill/>
+        </p:spPr>
+        <p:txBody>
+          <a:bodyPr wrap="square">
+            <a:spAutoFit/>
+          </a:bodyPr>
+          <a:lstStyle/>
+          <a:p>
+            <a:pPr algn="l"/>
+            <a:r>
+              <a:rPr sz="800" b="1" i="0">
+                <a:solidFill>
+                  <a:srgbClr val="FFFFFF"/>
+                </a:solidFill>
+              </a:rPr>
+              <a:t>Expected Benefit</a:t>
+            </a:r>
+          </a:p>
+        </p:txBody>
+      </p:sp>
+      <p:sp>
+        <p:nvSpPr>
+          <p:cNvPr id="12" name="Rectangle 11"/>
+          <p:cNvSpPr/>
+          <p:nvPr/>
+        </p:nvSpPr>
+        <p:spPr>
+          <a:xfrm>
+            <a:off x="274320" y="2560320"/>
+            <a:ext cx="2834640" cy="1115568"/>
+          </a:xfrm>
+          <a:prstGeom prst="rect">
+            <a:avLst/>
+          </a:prstGeom>
+          <a:solidFill>
+            <a:srgbClr val="D5E8D4"/>
+          </a:solidFill>
+          <a:ln>
+            <a:noFill/>
+          </a:ln>
+        </p:spPr>
+        <p:style>
+          <a:lnRef idx="1">
+            <a:schemeClr val="accent1"/>
+          </a:lnRef>
+          <a:fillRef idx="3">
+            <a:schemeClr val="accent1"/>
+          </a:fillRef>
+          <a:effectRef idx="2">
+            <a:schemeClr val="accent1"/>
+          </a:effectRef>
+          <a:fontRef idx="minor">
+            <a:schemeClr val="lt1"/>
+          </a:fontRef>
+        </p:style>
+        <p:txBody>
+          <a:bodyPr rtlCol="0" anchor="ctr"/>
+          <a:lstStyle/>
+          <a:p>
+            <a:pPr algn="ctr"/>
+          </a:p>
+        </p:txBody>
+      </p:sp>
+      <p:sp>
+        <p:nvSpPr>
+          <p:cNvPr id="13" name="TextBox 12"/>
+          <p:cNvSpPr txBox="1"/>
+          <p:nvPr/>
+        </p:nvSpPr>
+        <p:spPr>
+          <a:xfrm>
+            <a:off x="329184" y="2587752"/>
+            <a:ext cx="2724912" cy="1078992"/>
+          </a:xfrm>
+          <a:prstGeom prst="rect">
+            <a:avLst/>
+          </a:prstGeom>
+          <a:noFill/>
+        </p:spPr>
+        <p:txBody>
+          <a:bodyPr wrap="square">
+            <a:spAutoFit/>
+          </a:bodyPr>
+          <a:lstStyle/>
+          <a:p>
+            <a:pPr algn="l"/>
+            <a:r>
+              <a:rPr sz="800" b="0" i="0">
+                <a:solidFill>
+                  <a:srgbClr val="1F3864"/>
+                </a:solidFill>
+              </a:rPr>
+              <a:t>+15–20% incremental revenue from direct digital orders within 18 months</a:t>
+            </a:r>
+          </a:p>
+        </p:txBody>
+      </p:sp>
+      <p:sp>
+        <p:nvSpPr>
+          <p:cNvPr id="14" name="Rectangle 13"/>
+          <p:cNvSpPr/>
+          <p:nvPr/>
+        </p:nvSpPr>
+        <p:spPr>
+          <a:xfrm>
+            <a:off x="274320" y="3703320"/>
+            <a:ext cx="2834640" cy="274320"/>
+          </a:xfrm>
+          <a:prstGeom prst="rect">
+            <a:avLst/>
+          </a:prstGeom>
+          <a:solidFill>
+            <a:srgbClr val="FF0000"/>
+          </a:solidFill>
+          <a:ln>
+            <a:noFill/>
+          </a:ln>
+        </p:spPr>
+        <p:style>
+          <a:lnRef idx="1">
+            <a:schemeClr val="accent1"/>
+          </a:lnRef>
+          <a:fillRef idx="3">
+            <a:schemeClr val="accent1"/>
+          </a:fillRef>
+          <a:effectRef idx="2">
+            <a:schemeClr val="accent1"/>
+          </a:effectRef>
+          <a:fontRef idx="minor">
+            <a:schemeClr val="lt1"/>
+          </a:fontRef>
+        </p:style>
+        <p:txBody>
+          <a:bodyPr rtlCol="0" anchor="ctr"/>
+          <a:lstStyle/>
+          <a:p>
+            <a:pPr algn="ctr"/>
+          </a:p>
+        </p:txBody>
+      </p:sp>
+      <p:sp>
+        <p:nvSpPr>
+          <p:cNvPr id="15" name="TextBox 14"/>
+          <p:cNvSpPr txBox="1"/>
+          <p:nvPr/>
+        </p:nvSpPr>
+        <p:spPr>
+          <a:xfrm>
+            <a:off x="320040" y="3703320"/>
+            <a:ext cx="2834640" cy="274320"/>
+          </a:xfrm>
+          <a:prstGeom prst="rect">
+            <a:avLst/>
+          </a:prstGeom>
+          <a:noFill/>
+        </p:spPr>
+        <p:txBody>
+          <a:bodyPr wrap="square">
+            <a:spAutoFit/>
+          </a:bodyPr>
+          <a:lstStyle/>
+          <a:p>
+            <a:pPr algn="l"/>
+            <a:r>
+              <a:rPr sz="800" b="1" i="0">
+                <a:solidFill>
+                  <a:srgbClr val="FFFFFF"/>
+                </a:solidFill>
+              </a:rPr>
+              <a:t>Cost of Inaction</a:t>
+            </a:r>
+          </a:p>
+        </p:txBody>
+      </p:sp>
+      <p:sp>
+        <p:nvSpPr>
+          <p:cNvPr id="16" name="Rectangle 15"/>
+          <p:cNvSpPr/>
+          <p:nvPr/>
+        </p:nvSpPr>
+        <p:spPr>
+          <a:xfrm>
+            <a:off x="274320" y="3977640"/>
+            <a:ext cx="2834640" cy="1115568"/>
+          </a:xfrm>
+          <a:prstGeom prst="rect">
+            <a:avLst/>
+          </a:prstGeom>
+          <a:solidFill>
+            <a:srgbClr val="F8CECC"/>
+          </a:solidFill>
+          <a:ln>
+            <a:noFill/>
+          </a:ln>
+        </p:spPr>
+        <p:style>
+          <a:lnRef idx="1">
+            <a:schemeClr val="accent1"/>
+          </a:lnRef>
+          <a:fillRef idx="3">
+            <a:schemeClr val="accent1"/>
+          </a:fillRef>
+          <a:effectRef idx="2">
+            <a:schemeClr val="accent1"/>
+          </a:effectRef>
+          <a:fontRef idx="minor">
+            <a:schemeClr val="lt1"/>
+          </a:fontRef>
+        </p:style>
+        <p:txBody>
+          <a:bodyPr rtlCol="0" anchor="ctr"/>
+          <a:lstStyle/>
+          <a:p>
+            <a:pPr algn="ctr"/>
+          </a:p>
+        </p:txBody>
+      </p:sp>
+      <p:sp>
+        <p:nvSpPr>
+          <p:cNvPr id="17" name="TextBox 16"/>
+          <p:cNvSpPr txBox="1"/>
+          <p:nvPr/>
+        </p:nvSpPr>
+        <p:spPr>
+          <a:xfrm>
+            <a:off x="329184" y="4005072"/>
+            <a:ext cx="2724912" cy="1078992"/>
+          </a:xfrm>
+          <a:prstGeom prst="rect">
+            <a:avLst/>
+          </a:prstGeom>
+          <a:noFill/>
+        </p:spPr>
+        <p:txBody>
+          <a:bodyPr wrap="square">
+            <a:spAutoFit/>
+          </a:bodyPr>
+          <a:lstStyle/>
+          <a:p>
+            <a:pPr algn="l"/>
+            <a:r>
+              <a:rPr sz="800" b="0" i="0">
+                <a:solidFill>
+                  <a:srgbClr val="7F0000"/>
+                </a:solidFill>
+              </a:rPr>
+              <a:t>Global competitors (SMC, Festo) own digital search — every quarter cedes buyer mindshare</a:t>
+            </a:r>
+          </a:p>
+        </p:txBody>
+      </p:sp>
+      <p:sp>
+        <p:nvSpPr>
+          <p:cNvPr id="18" name="Rectangle 17"/>
+          <p:cNvSpPr/>
+          <p:nvPr/>
+        </p:nvSpPr>
+        <p:spPr>
+          <a:xfrm>
+            <a:off x="274320" y="5120640"/>
+            <a:ext cx="2834640" cy="274320"/>
+          </a:xfrm>
+          <a:prstGeom prst="rect">
+            <a:avLst/>
+          </a:prstGeom>
+          <a:solidFill>
+            <a:srgbClr val="2E75B6"/>
+          </a:solidFill>
+          <a:ln>
+            <a:noFill/>
+          </a:ln>
+        </p:spPr>
+        <p:style>
+          <a:lnRef idx="1">
+            <a:schemeClr val="accent1"/>
+          </a:lnRef>
+          <a:fillRef idx="3">
+            <a:schemeClr val="accent1"/>
+          </a:fillRef>
+          <a:effectRef idx="2">
+            <a:schemeClr val="accent1"/>
+          </a:effectRef>
+          <a:fontRef idx="minor">
+            <a:schemeClr val="lt1"/>
+          </a:fontRef>
+        </p:style>
+        <p:txBody>
+          <a:bodyPr rtlCol="0" anchor="ctr"/>
+          <a:lstStyle/>
+          <a:p>
+            <a:pPr algn="ctr"/>
+          </a:p>
+        </p:txBody>
+      </p:sp>
+      <p:sp>
+        <p:nvSpPr>
+          <p:cNvPr id="19" name="TextBox 18"/>
+          <p:cNvSpPr txBox="1"/>
+          <p:nvPr/>
+        </p:nvSpPr>
+        <p:spPr>
+          <a:xfrm>
+            <a:off x="320040" y="5120640"/>
+            <a:ext cx="2834640" cy="274320"/>
+          </a:xfrm>
+          <a:prstGeom prst="rect">
+            <a:avLst/>
+          </a:prstGeom>
+          <a:noFill/>
+        </p:spPr>
+        <p:txBody>
+          <a:bodyPr wrap="square">
+            <a:spAutoFit/>
+          </a:bodyPr>
+          <a:lstStyle/>
+          <a:p>
+            <a:pPr algn="l"/>
+            <a:r>
+              <a:rPr sz="800" b="1" i="0">
+                <a:solidFill>
+                  <a:srgbClr val="FFFFFF"/>
+                </a:solidFill>
+              </a:rPr>
+              <a:t>Why Now</a:t>
+            </a:r>
+          </a:p>
+        </p:txBody>
+      </p:sp>
+      <p:sp>
+        <p:nvSpPr>
+          <p:cNvPr id="20" name="Rectangle 19"/>
+          <p:cNvSpPr/>
+          <p:nvPr/>
+        </p:nvSpPr>
+        <p:spPr>
+          <a:xfrm>
+            <a:off x="274320" y="5394960"/>
+            <a:ext cx="2834640" cy="1115568"/>
+          </a:xfrm>
+          <a:prstGeom prst="rect">
+            <a:avLst/>
+          </a:prstGeom>
+          <a:solidFill>
+            <a:srgbClr val="DAE8FC"/>
+          </a:solidFill>
+          <a:ln>
+            <a:noFill/>
+          </a:ln>
+        </p:spPr>
+        <p:style>
+          <a:lnRef idx="1">
+            <a:schemeClr val="accent1"/>
+          </a:lnRef>
+          <a:fillRef idx="3">
+            <a:schemeClr val="accent1"/>
+          </a:fillRef>
+          <a:effectRef idx="2">
+            <a:schemeClr val="accent1"/>
+          </a:effectRef>
+          <a:fontRef idx="minor">
+            <a:schemeClr val="lt1"/>
+          </a:fontRef>
+        </p:style>
+        <p:txBody>
+          <a:bodyPr rtlCol="0" anchor="ctr"/>
+          <a:lstStyle/>
+          <a:p>
+            <a:pPr algn="ctr"/>
+          </a:p>
+        </p:txBody>
+      </p:sp>
+      <p:sp>
+        <p:nvSpPr>
+          <p:cNvPr id="21" name="TextBox 20"/>
+          <p:cNvSpPr txBox="1"/>
+          <p:nvPr/>
+        </p:nvSpPr>
+        <p:spPr>
+          <a:xfrm>
+            <a:off x="329184" y="5422392"/>
+            <a:ext cx="2724912" cy="1078992"/>
+          </a:xfrm>
+          <a:prstGeom prst="rect">
+            <a:avLst/>
+          </a:prstGeom>
+          <a:noFill/>
+        </p:spPr>
+        <p:txBody>
+          <a:bodyPr wrap="square">
+            <a:spAutoFit/>
+          </a:bodyPr>
+          <a:lstStyle/>
+          <a:p>
+            <a:pPr algn="l"/>
+            <a:r>
+              <a:rPr sz="800" b="0" i="0">
+                <a:solidFill>
+                  <a:srgbClr val="1F3864"/>
+                </a:solidFill>
+              </a:rPr>
+              <a:t>India B2B e-commerce growing 25%+ p.a.; 49-yr brand + 3,500 SKUs = digital-first advantage</a:t>
+            </a:r>
+          </a:p>
+        </p:txBody>
+      </p:sp>
+      <p:sp>
+        <p:nvSpPr>
+          <p:cNvPr id="22" name="Rectangle 21"/>
+          <p:cNvSpPr/>
+          <p:nvPr/>
+        </p:nvSpPr>
+        <p:spPr>
+          <a:xfrm>
+            <a:off x="3227832" y="1051560"/>
+            <a:ext cx="2834640" cy="384048"/>
+          </a:xfrm>
+          <a:prstGeom prst="rect">
+            <a:avLst/>
+          </a:prstGeom>
+          <a:solidFill>
+            <a:srgbClr val="FF0000"/>
+          </a:solidFill>
+          <a:ln>
+            <a:noFill/>
+          </a:ln>
+        </p:spPr>
+        <p:style>
+          <a:lnRef idx="1">
+            <a:schemeClr val="accent1"/>
+          </a:lnRef>
+          <a:fillRef idx="3">
+            <a:schemeClr val="accent1"/>
+          </a:fillRef>
+          <a:effectRef idx="2">
+            <a:schemeClr val="accent1"/>
+          </a:effectRef>
+          <a:fontRef idx="minor">
+            <a:schemeClr val="lt1"/>
+          </a:fontRef>
+        </p:style>
+        <p:txBody>
+          <a:bodyPr rtlCol="0" anchor="ctr"/>
+          <a:lstStyle/>
+          <a:p>
+            <a:pPr algn="ctr"/>
+          </a:p>
+        </p:txBody>
+      </p:sp>
+      <p:sp>
+        <p:nvSpPr>
+          <p:cNvPr id="23" name="TextBox 22"/>
+          <p:cNvSpPr txBox="1"/>
+          <p:nvPr/>
+        </p:nvSpPr>
+        <p:spPr>
+          <a:xfrm>
+            <a:off x="3227832" y="1051560"/>
+            <a:ext cx="2834640" cy="384048"/>
+          </a:xfrm>
+          <a:prstGeom prst="rect">
+            <a:avLst/>
+          </a:prstGeom>
+          <a:noFill/>
+        </p:spPr>
+        <p:txBody>
+          <a:bodyPr wrap="square">
+            <a:spAutoFit/>
+          </a:bodyPr>
+          <a:lstStyle/>
+          <a:p>
+            <a:pPr algn="ctr"/>
+            <a:r>
               <a:rPr sz="1000" b="1" i="0">
                 <a:solidFill>
                   <a:srgbClr val="FFFFFF"/>
                 </a:solidFill>
               </a:rPr>
-              <a:t>Strengths to leverage</a:t>
-            </a:r>
-          </a:p>
-        </p:txBody>
-      </p:sp>
-      <p:sp>
-        <p:nvSpPr>
-          <p:cNvPr id="8" name="Rectangle 7"/>
-          <p:cNvSpPr/>
-          <p:nvPr/>
-        </p:nvSpPr>
-        <p:spPr>
-          <a:xfrm>
-            <a:off x="3017520" y="1920240"/>
-            <a:ext cx="8778240" cy="1005840"/>
+              <a:t>#02  HIGH</a:t>
+            </a:r>
+          </a:p>
+        </p:txBody>
+      </p:sp>
+      <p:sp>
+        <p:nvSpPr>
+          <p:cNvPr id="24" name="Rectangle 23"/>
+          <p:cNvSpPr/>
+          <p:nvPr/>
+        </p:nvSpPr>
+        <p:spPr>
+          <a:xfrm>
+            <a:off x="3227832" y="1463040"/>
+            <a:ext cx="2834640" cy="475488"/>
+          </a:xfrm>
+          <a:prstGeom prst="rect">
+            <a:avLst/>
+          </a:prstGeom>
+          <a:solidFill>
+            <a:srgbClr val="2E75B6"/>
+          </a:solidFill>
+          <a:ln>
+            <a:noFill/>
+          </a:ln>
+        </p:spPr>
+        <p:style>
+          <a:lnRef idx="1">
+            <a:schemeClr val="accent1"/>
+          </a:lnRef>
+          <a:fillRef idx="3">
+            <a:schemeClr val="accent1"/>
+          </a:fillRef>
+          <a:effectRef idx="2">
+            <a:schemeClr val="accent1"/>
+          </a:effectRef>
+          <a:fontRef idx="minor">
+            <a:schemeClr val="lt1"/>
+          </a:fontRef>
+        </p:style>
+        <p:txBody>
+          <a:bodyPr rtlCol="0" anchor="ctr"/>
+          <a:lstStyle/>
+          <a:p>
+            <a:pPr algn="ctr"/>
+          </a:p>
+        </p:txBody>
+      </p:sp>
+      <p:sp>
+        <p:nvSpPr>
+          <p:cNvPr id="25" name="TextBox 24"/>
+          <p:cNvSpPr txBox="1"/>
+          <p:nvPr/>
+        </p:nvSpPr>
+        <p:spPr>
+          <a:xfrm>
+            <a:off x="3273552" y="1481328"/>
+            <a:ext cx="2743200" cy="438912"/>
+          </a:xfrm>
+          <a:prstGeom prst="rect">
+            <a:avLst/>
+          </a:prstGeom>
+          <a:noFill/>
+        </p:spPr>
+        <p:txBody>
+          <a:bodyPr wrap="square">
+            <a:spAutoFit/>
+          </a:bodyPr>
+          <a:lstStyle/>
+          <a:p>
+            <a:pPr algn="l"/>
+            <a:r>
+              <a:rPr sz="1100" b="1" i="0">
+                <a:solidFill>
+                  <a:srgbClr val="FFFFFF"/>
+                </a:solidFill>
+              </a:rPr>
+              <a:t>Deploy ERP + Supply Chain Visibility</a:t>
+            </a:r>
+          </a:p>
+        </p:txBody>
+      </p:sp>
+      <p:sp>
+        <p:nvSpPr>
+          <p:cNvPr id="26" name="Rectangle 25"/>
+          <p:cNvSpPr/>
+          <p:nvPr/>
+        </p:nvSpPr>
+        <p:spPr>
+          <a:xfrm>
+            <a:off x="3227832" y="1965960"/>
+            <a:ext cx="2834640" cy="292608"/>
           </a:xfrm>
           <a:prstGeom prst="rect">
             <a:avLst/>
@@ -15800,14 +17008,14 @@
       </p:sp>
       <p:sp>
         <p:nvSpPr>
-          <p:cNvPr id="9" name="TextBox 8"/>
-          <p:cNvSpPr txBox="1"/>
-          <p:nvPr/>
-        </p:nvSpPr>
-        <p:spPr>
-          <a:xfrm>
-            <a:off x="3108960" y="1965960"/>
-            <a:ext cx="8595360" cy="914400"/>
+          <p:cNvPr id="27" name="TextBox 26"/>
+          <p:cNvSpPr txBox="1"/>
+          <p:nvPr/>
+        </p:nvSpPr>
+        <p:spPr>
+          <a:xfrm>
+            <a:off x="3273552" y="1975104"/>
+            <a:ext cx="2743200" cy="274320"/>
           </a:xfrm>
           <a:prstGeom prst="rect">
             <a:avLst/>
@@ -15822,26 +17030,334 @@
           <a:p>
             <a:pPr algn="l"/>
             <a:r>
-              <a:rPr sz="900" b="0" i="0">
+              <a:rPr sz="800" b="1" i="0">
                 <a:solidFill>
                   <a:srgbClr val="1F3864"/>
                 </a:solidFill>
               </a:rPr>
-              <a:t>49-year brand with ICRA-validated credit health. Global distribution in 42 countries and 17,000+ customers provides revenue resilience. DSIR R&amp;D and 3,500+ SKU portfolio enable single-source supplier status with OEMs.</a:t>
-            </a:r>
-          </a:p>
-        </p:txBody>
-      </p:sp>
-      <p:sp>
-        <p:nvSpPr>
-          <p:cNvPr id="10" name="Rectangle 9"/>
-          <p:cNvSpPr/>
-          <p:nvPr/>
-        </p:nvSpPr>
-        <p:spPr>
-          <a:xfrm>
-            <a:off x="365760" y="3108960"/>
-            <a:ext cx="2560320" cy="1005840"/>
+              <a:t>Gap: OSC02: 50/100</a:t>
+            </a:r>
+          </a:p>
+        </p:txBody>
+      </p:sp>
+      <p:sp>
+        <p:nvSpPr>
+          <p:cNvPr id="28" name="Rectangle 27"/>
+          <p:cNvSpPr/>
+          <p:nvPr/>
+        </p:nvSpPr>
+        <p:spPr>
+          <a:xfrm>
+            <a:off x="3227832" y="2286000"/>
+            <a:ext cx="2834640" cy="274320"/>
+          </a:xfrm>
+          <a:prstGeom prst="rect">
+            <a:avLst/>
+          </a:prstGeom>
+          <a:solidFill>
+            <a:srgbClr val="FF0000"/>
+          </a:solidFill>
+          <a:ln>
+            <a:noFill/>
+          </a:ln>
+        </p:spPr>
+        <p:style>
+          <a:lnRef idx="1">
+            <a:schemeClr val="accent1"/>
+          </a:lnRef>
+          <a:fillRef idx="3">
+            <a:schemeClr val="accent1"/>
+          </a:fillRef>
+          <a:effectRef idx="2">
+            <a:schemeClr val="accent1"/>
+          </a:effectRef>
+          <a:fontRef idx="minor">
+            <a:schemeClr val="lt1"/>
+          </a:fontRef>
+        </p:style>
+        <p:txBody>
+          <a:bodyPr rtlCol="0" anchor="ctr"/>
+          <a:lstStyle/>
+          <a:p>
+            <a:pPr algn="ctr"/>
+          </a:p>
+        </p:txBody>
+      </p:sp>
+      <p:sp>
+        <p:nvSpPr>
+          <p:cNvPr id="29" name="TextBox 28"/>
+          <p:cNvSpPr txBox="1"/>
+          <p:nvPr/>
+        </p:nvSpPr>
+        <p:spPr>
+          <a:xfrm>
+            <a:off x="3273552" y="2286000"/>
+            <a:ext cx="2834640" cy="274320"/>
+          </a:xfrm>
+          <a:prstGeom prst="rect">
+            <a:avLst/>
+          </a:prstGeom>
+          <a:noFill/>
+        </p:spPr>
+        <p:txBody>
+          <a:bodyPr wrap="square">
+            <a:spAutoFit/>
+          </a:bodyPr>
+          <a:lstStyle/>
+          <a:p>
+            <a:pPr algn="l"/>
+            <a:r>
+              <a:rPr sz="800" b="1" i="0">
+                <a:solidFill>
+                  <a:srgbClr val="FFFFFF"/>
+                </a:solidFill>
+              </a:rPr>
+              <a:t>Expected Benefit</a:t>
+            </a:r>
+          </a:p>
+        </p:txBody>
+      </p:sp>
+      <p:sp>
+        <p:nvSpPr>
+          <p:cNvPr id="30" name="Rectangle 29"/>
+          <p:cNvSpPr/>
+          <p:nvPr/>
+        </p:nvSpPr>
+        <p:spPr>
+          <a:xfrm>
+            <a:off x="3227832" y="2560320"/>
+            <a:ext cx="2834640" cy="1115568"/>
+          </a:xfrm>
+          <a:prstGeom prst="rect">
+            <a:avLst/>
+          </a:prstGeom>
+          <a:solidFill>
+            <a:srgbClr val="D5E8D4"/>
+          </a:solidFill>
+          <a:ln>
+            <a:noFill/>
+          </a:ln>
+        </p:spPr>
+        <p:style>
+          <a:lnRef idx="1">
+            <a:schemeClr val="accent1"/>
+          </a:lnRef>
+          <a:fillRef idx="3">
+            <a:schemeClr val="accent1"/>
+          </a:fillRef>
+          <a:effectRef idx="2">
+            <a:schemeClr val="accent1"/>
+          </a:effectRef>
+          <a:fontRef idx="minor">
+            <a:schemeClr val="lt1"/>
+          </a:fontRef>
+        </p:style>
+        <p:txBody>
+          <a:bodyPr rtlCol="0" anchor="ctr"/>
+          <a:lstStyle/>
+          <a:p>
+            <a:pPr algn="ctr"/>
+          </a:p>
+        </p:txBody>
+      </p:sp>
+      <p:sp>
+        <p:nvSpPr>
+          <p:cNvPr id="31" name="TextBox 30"/>
+          <p:cNvSpPr txBox="1"/>
+          <p:nvPr/>
+        </p:nvSpPr>
+        <p:spPr>
+          <a:xfrm>
+            <a:off x="3282696" y="2587752"/>
+            <a:ext cx="2724912" cy="1078992"/>
+          </a:xfrm>
+          <a:prstGeom prst="rect">
+            <a:avLst/>
+          </a:prstGeom>
+          <a:noFill/>
+        </p:spPr>
+        <p:txBody>
+          <a:bodyPr wrap="square">
+            <a:spAutoFit/>
+          </a:bodyPr>
+          <a:lstStyle/>
+          <a:p>
+            <a:pPr algn="l"/>
+            <a:r>
+              <a:rPr sz="800" b="0" i="0">
+                <a:solidFill>
+                  <a:srgbClr val="1F3864"/>
+                </a:solidFill>
+              </a:rPr>
+              <a:t>10–15% operational efficiency gain; unlock global OEM export qualifications</a:t>
+            </a:r>
+          </a:p>
+        </p:txBody>
+      </p:sp>
+      <p:sp>
+        <p:nvSpPr>
+          <p:cNvPr id="32" name="Rectangle 31"/>
+          <p:cNvSpPr/>
+          <p:nvPr/>
+        </p:nvSpPr>
+        <p:spPr>
+          <a:xfrm>
+            <a:off x="3227832" y="3703320"/>
+            <a:ext cx="2834640" cy="274320"/>
+          </a:xfrm>
+          <a:prstGeom prst="rect">
+            <a:avLst/>
+          </a:prstGeom>
+          <a:solidFill>
+            <a:srgbClr val="FF0000"/>
+          </a:solidFill>
+          <a:ln>
+            <a:noFill/>
+          </a:ln>
+        </p:spPr>
+        <p:style>
+          <a:lnRef idx="1">
+            <a:schemeClr val="accent1"/>
+          </a:lnRef>
+          <a:fillRef idx="3">
+            <a:schemeClr val="accent1"/>
+          </a:fillRef>
+          <a:effectRef idx="2">
+            <a:schemeClr val="accent1"/>
+          </a:effectRef>
+          <a:fontRef idx="minor">
+            <a:schemeClr val="lt1"/>
+          </a:fontRef>
+        </p:style>
+        <p:txBody>
+          <a:bodyPr rtlCol="0" anchor="ctr"/>
+          <a:lstStyle/>
+          <a:p>
+            <a:pPr algn="ctr"/>
+          </a:p>
+        </p:txBody>
+      </p:sp>
+      <p:sp>
+        <p:nvSpPr>
+          <p:cNvPr id="33" name="TextBox 32"/>
+          <p:cNvSpPr txBox="1"/>
+          <p:nvPr/>
+        </p:nvSpPr>
+        <p:spPr>
+          <a:xfrm>
+            <a:off x="3273552" y="3703320"/>
+            <a:ext cx="2834640" cy="274320"/>
+          </a:xfrm>
+          <a:prstGeom prst="rect">
+            <a:avLst/>
+          </a:prstGeom>
+          <a:noFill/>
+        </p:spPr>
+        <p:txBody>
+          <a:bodyPr wrap="square">
+            <a:spAutoFit/>
+          </a:bodyPr>
+          <a:lstStyle/>
+          <a:p>
+            <a:pPr algn="l"/>
+            <a:r>
+              <a:rPr sz="800" b="1" i="0">
+                <a:solidFill>
+                  <a:srgbClr val="FFFFFF"/>
+                </a:solidFill>
+              </a:rPr>
+              <a:t>Cost of Inaction</a:t>
+            </a:r>
+          </a:p>
+        </p:txBody>
+      </p:sp>
+      <p:sp>
+        <p:nvSpPr>
+          <p:cNvPr id="34" name="Rectangle 33"/>
+          <p:cNvSpPr/>
+          <p:nvPr/>
+        </p:nvSpPr>
+        <p:spPr>
+          <a:xfrm>
+            <a:off x="3227832" y="3977640"/>
+            <a:ext cx="2834640" cy="1115568"/>
+          </a:xfrm>
+          <a:prstGeom prst="rect">
+            <a:avLst/>
+          </a:prstGeom>
+          <a:solidFill>
+            <a:srgbClr val="F8CECC"/>
+          </a:solidFill>
+          <a:ln>
+            <a:noFill/>
+          </a:ln>
+        </p:spPr>
+        <p:style>
+          <a:lnRef idx="1">
+            <a:schemeClr val="accent1"/>
+          </a:lnRef>
+          <a:fillRef idx="3">
+            <a:schemeClr val="accent1"/>
+          </a:fillRef>
+          <a:effectRef idx="2">
+            <a:schemeClr val="accent1"/>
+          </a:effectRef>
+          <a:fontRef idx="minor">
+            <a:schemeClr val="lt1"/>
+          </a:fontRef>
+        </p:style>
+        <p:txBody>
+          <a:bodyPr rtlCol="0" anchor="ctr"/>
+          <a:lstStyle/>
+          <a:p>
+            <a:pPr algn="ctr"/>
+          </a:p>
+        </p:txBody>
+      </p:sp>
+      <p:sp>
+        <p:nvSpPr>
+          <p:cNvPr id="35" name="TextBox 34"/>
+          <p:cNvSpPr txBox="1"/>
+          <p:nvPr/>
+        </p:nvSpPr>
+        <p:spPr>
+          <a:xfrm>
+            <a:off x="3282696" y="4005072"/>
+            <a:ext cx="2724912" cy="1078992"/>
+          </a:xfrm>
+          <a:prstGeom prst="rect">
+            <a:avLst/>
+          </a:prstGeom>
+          <a:noFill/>
+        </p:spPr>
+        <p:txBody>
+          <a:bodyPr wrap="square">
+            <a:spAutoFit/>
+          </a:bodyPr>
+          <a:lstStyle/>
+          <a:p>
+            <a:pPr algn="l"/>
+            <a:r>
+              <a:rPr sz="800" b="0" i="0">
+                <a:solidFill>
+                  <a:srgbClr val="7F0000"/>
+                </a:solidFill>
+              </a:rPr>
+              <a:t>OEM buyers mandate digital traceability — no ERP = disqualified from high-value RFQs</a:t>
+            </a:r>
+          </a:p>
+        </p:txBody>
+      </p:sp>
+      <p:sp>
+        <p:nvSpPr>
+          <p:cNvPr id="36" name="Rectangle 35"/>
+          <p:cNvSpPr/>
+          <p:nvPr/>
+        </p:nvSpPr>
+        <p:spPr>
+          <a:xfrm>
+            <a:off x="3227832" y="5120640"/>
+            <a:ext cx="2834640" cy="274320"/>
           </a:xfrm>
           <a:prstGeom prst="rect">
             <a:avLst/>
@@ -15877,14 +17393,14 @@
       </p:sp>
       <p:sp>
         <p:nvSpPr>
-          <p:cNvPr id="11" name="TextBox 10"/>
-          <p:cNvSpPr txBox="1"/>
-          <p:nvPr/>
-        </p:nvSpPr>
-        <p:spPr>
-          <a:xfrm>
-            <a:off x="411480" y="3200400"/>
-            <a:ext cx="2468880" cy="822960"/>
+          <p:cNvPr id="37" name="TextBox 36"/>
+          <p:cNvSpPr txBox="1"/>
+          <p:nvPr/>
+        </p:nvSpPr>
+        <p:spPr>
+          <a:xfrm>
+            <a:off x="3273552" y="5120640"/>
+            <a:ext cx="2834640" cy="274320"/>
           </a:xfrm>
           <a:prstGeom prst="rect">
             <a:avLst/>
@@ -15899,26 +17415,257 @@
           <a:p>
             <a:pPr algn="l"/>
             <a:r>
+              <a:rPr sz="800" b="1" i="0">
+                <a:solidFill>
+                  <a:srgbClr val="FFFFFF"/>
+                </a:solidFill>
+              </a:rPr>
+              <a:t>Why Now</a:t>
+            </a:r>
+          </a:p>
+        </p:txBody>
+      </p:sp>
+      <p:sp>
+        <p:nvSpPr>
+          <p:cNvPr id="38" name="Rectangle 37"/>
+          <p:cNvSpPr/>
+          <p:nvPr/>
+        </p:nvSpPr>
+        <p:spPr>
+          <a:xfrm>
+            <a:off x="3227832" y="5394960"/>
+            <a:ext cx="2834640" cy="1115568"/>
+          </a:xfrm>
+          <a:prstGeom prst="rect">
+            <a:avLst/>
+          </a:prstGeom>
+          <a:solidFill>
+            <a:srgbClr val="DAE8FC"/>
+          </a:solidFill>
+          <a:ln>
+            <a:noFill/>
+          </a:ln>
+        </p:spPr>
+        <p:style>
+          <a:lnRef idx="1">
+            <a:schemeClr val="accent1"/>
+          </a:lnRef>
+          <a:fillRef idx="3">
+            <a:schemeClr val="accent1"/>
+          </a:fillRef>
+          <a:effectRef idx="2">
+            <a:schemeClr val="accent1"/>
+          </a:effectRef>
+          <a:fontRef idx="minor">
+            <a:schemeClr val="lt1"/>
+          </a:fontRef>
+        </p:style>
+        <p:txBody>
+          <a:bodyPr rtlCol="0" anchor="ctr"/>
+          <a:lstStyle/>
+          <a:p>
+            <a:pPr algn="ctr"/>
+          </a:p>
+        </p:txBody>
+      </p:sp>
+      <p:sp>
+        <p:nvSpPr>
+          <p:cNvPr id="39" name="TextBox 38"/>
+          <p:cNvSpPr txBox="1"/>
+          <p:nvPr/>
+        </p:nvSpPr>
+        <p:spPr>
+          <a:xfrm>
+            <a:off x="3282696" y="5422392"/>
+            <a:ext cx="2724912" cy="1078992"/>
+          </a:xfrm>
+          <a:prstGeom prst="rect">
+            <a:avLst/>
+          </a:prstGeom>
+          <a:noFill/>
+        </p:spPr>
+        <p:txBody>
+          <a:bodyPr wrap="square">
+            <a:spAutoFit/>
+          </a:bodyPr>
+          <a:lstStyle/>
+          <a:p>
+            <a:pPr algn="l"/>
+            <a:r>
+              <a:rPr sz="800" b="0" i="0">
+                <a:solidFill>
+                  <a:srgbClr val="1F3864"/>
+                </a:solidFill>
+              </a:rPr>
+              <a:t>China+1 OEM inquiry window is open NOW — digital ops credibility needed to convert</a:t>
+            </a:r>
+          </a:p>
+        </p:txBody>
+      </p:sp>
+      <p:sp>
+        <p:nvSpPr>
+          <p:cNvPr id="40" name="Rectangle 39"/>
+          <p:cNvSpPr/>
+          <p:nvPr/>
+        </p:nvSpPr>
+        <p:spPr>
+          <a:xfrm>
+            <a:off x="6181344" y="1051560"/>
+            <a:ext cx="2834640" cy="384048"/>
+          </a:xfrm>
+          <a:prstGeom prst="rect">
+            <a:avLst/>
+          </a:prstGeom>
+          <a:solidFill>
+            <a:srgbClr val="FFC000"/>
+          </a:solidFill>
+          <a:ln>
+            <a:noFill/>
+          </a:ln>
+        </p:spPr>
+        <p:style>
+          <a:lnRef idx="1">
+            <a:schemeClr val="accent1"/>
+          </a:lnRef>
+          <a:fillRef idx="3">
+            <a:schemeClr val="accent1"/>
+          </a:fillRef>
+          <a:effectRef idx="2">
+            <a:schemeClr val="accent1"/>
+          </a:effectRef>
+          <a:fontRef idx="minor">
+            <a:schemeClr val="lt1"/>
+          </a:fontRef>
+        </p:style>
+        <p:txBody>
+          <a:bodyPr rtlCol="0" anchor="ctr"/>
+          <a:lstStyle/>
+          <a:p>
+            <a:pPr algn="ctr"/>
+          </a:p>
+        </p:txBody>
+      </p:sp>
+      <p:sp>
+        <p:nvSpPr>
+          <p:cNvPr id="41" name="TextBox 40"/>
+          <p:cNvSpPr txBox="1"/>
+          <p:nvPr/>
+        </p:nvSpPr>
+        <p:spPr>
+          <a:xfrm>
+            <a:off x="6181344" y="1051560"/>
+            <a:ext cx="2834640" cy="384048"/>
+          </a:xfrm>
+          <a:prstGeom prst="rect">
+            <a:avLst/>
+          </a:prstGeom>
+          <a:noFill/>
+        </p:spPr>
+        <p:txBody>
+          <a:bodyPr wrap="square">
+            <a:spAutoFit/>
+          </a:bodyPr>
+          <a:lstStyle/>
+          <a:p>
+            <a:pPr algn="ctr"/>
+            <a:r>
               <a:rPr sz="1000" b="1" i="0">
                 <a:solidFill>
                   <a:srgbClr val="FFFFFF"/>
                 </a:solidFill>
               </a:rPr>
-              <a:t>Watch points</a:t>
-            </a:r>
-          </a:p>
-        </p:txBody>
-      </p:sp>
-      <p:sp>
-        <p:nvSpPr>
-          <p:cNvPr id="12" name="Rectangle 11"/>
-          <p:cNvSpPr/>
-          <p:nvPr/>
-        </p:nvSpPr>
-        <p:spPr>
-          <a:xfrm>
-            <a:off x="3017520" y="3108960"/>
-            <a:ext cx="8778240" cy="1005840"/>
+              <a:t>#03  MEDIUM</a:t>
+            </a:r>
+          </a:p>
+        </p:txBody>
+      </p:sp>
+      <p:sp>
+        <p:nvSpPr>
+          <p:cNvPr id="42" name="Rectangle 41"/>
+          <p:cNvSpPr/>
+          <p:nvPr/>
+        </p:nvSpPr>
+        <p:spPr>
+          <a:xfrm>
+            <a:off x="6181344" y="1463040"/>
+            <a:ext cx="2834640" cy="475488"/>
+          </a:xfrm>
+          <a:prstGeom prst="rect">
+            <a:avLst/>
+          </a:prstGeom>
+          <a:solidFill>
+            <a:srgbClr val="2E75B6"/>
+          </a:solidFill>
+          <a:ln>
+            <a:noFill/>
+          </a:ln>
+        </p:spPr>
+        <p:style>
+          <a:lnRef idx="1">
+            <a:schemeClr val="accent1"/>
+          </a:lnRef>
+          <a:fillRef idx="3">
+            <a:schemeClr val="accent1"/>
+          </a:fillRef>
+          <a:effectRef idx="2">
+            <a:schemeClr val="accent1"/>
+          </a:effectRef>
+          <a:fontRef idx="minor">
+            <a:schemeClr val="lt1"/>
+          </a:fontRef>
+        </p:style>
+        <p:txBody>
+          <a:bodyPr rtlCol="0" anchor="ctr"/>
+          <a:lstStyle/>
+          <a:p>
+            <a:pPr algn="ctr"/>
+          </a:p>
+        </p:txBody>
+      </p:sp>
+      <p:sp>
+        <p:nvSpPr>
+          <p:cNvPr id="43" name="TextBox 42"/>
+          <p:cNvSpPr txBox="1"/>
+          <p:nvPr/>
+        </p:nvSpPr>
+        <p:spPr>
+          <a:xfrm>
+            <a:off x="6227064" y="1481328"/>
+            <a:ext cx="2743200" cy="438912"/>
+          </a:xfrm>
+          <a:prstGeom prst="rect">
+            <a:avLst/>
+          </a:prstGeom>
+          <a:noFill/>
+        </p:spPr>
+        <p:txBody>
+          <a:bodyPr wrap="square">
+            <a:spAutoFit/>
+          </a:bodyPr>
+          <a:lstStyle/>
+          <a:p>
+            <a:pPr algn="l"/>
+            <a:r>
+              <a:rPr sz="1100" b="1" i="0">
+                <a:solidFill>
+                  <a:srgbClr val="FFFFFF"/>
+                </a:solidFill>
+              </a:rPr>
+              <a:t>Digital Workforce Upskilling Program</a:t>
+            </a:r>
+          </a:p>
+        </p:txBody>
+      </p:sp>
+      <p:sp>
+        <p:nvSpPr>
+          <p:cNvPr id="44" name="Rectangle 43"/>
+          <p:cNvSpPr/>
+          <p:nvPr/>
+        </p:nvSpPr>
+        <p:spPr>
+          <a:xfrm>
+            <a:off x="6181344" y="1965960"/>
+            <a:ext cx="2834640" cy="292608"/>
           </a:xfrm>
           <a:prstGeom prst="rect">
             <a:avLst/>
@@ -15954,14 +17701,14 @@
       </p:sp>
       <p:sp>
         <p:nvSpPr>
-          <p:cNvPr id="13" name="TextBox 12"/>
-          <p:cNvSpPr txBox="1"/>
-          <p:nvPr/>
-        </p:nvSpPr>
-        <p:spPr>
-          <a:xfrm>
-            <a:off x="3108960" y="3154680"/>
-            <a:ext cx="8595360" cy="914400"/>
+          <p:cNvPr id="45" name="TextBox 44"/>
+          <p:cNvSpPr txBox="1"/>
+          <p:nvPr/>
+        </p:nvSpPr>
+        <p:spPr>
+          <a:xfrm>
+            <a:off x="6227064" y="1975104"/>
+            <a:ext cx="2743200" cy="274320"/>
           </a:xfrm>
           <a:prstGeom prst="rect">
             <a:avLst/>
@@ -15976,26 +17723,334 @@
           <a:p>
             <a:pPr algn="l"/>
             <a:r>
-              <a:rPr sz="900" b="0" i="0">
+              <a:rPr sz="800" b="1" i="0">
                 <a:solidFill>
                   <a:srgbClr val="1F3864"/>
                 </a:solidFill>
               </a:rPr>
-              <a:t>EBITDA CAGR of -22% (FY25) requires explanation — request full P&amp;L and management commentary on margin drivers. Revenue growth at 4% trails the 6.9% sector CAGR.</a:t>
-            </a:r>
-          </a:p>
-        </p:txBody>
-      </p:sp>
-      <p:sp>
-        <p:nvSpPr>
-          <p:cNvPr id="14" name="Rectangle 13"/>
-          <p:cNvSpPr/>
-          <p:nvPr/>
-        </p:nvSpPr>
-        <p:spPr>
-          <a:xfrm>
-            <a:off x="365760" y="4297680"/>
-            <a:ext cx="2560320" cy="1005840"/>
+              <a:t>Gap: SC03: 50/100 · SC01: 55/100</a:t>
+            </a:r>
+          </a:p>
+        </p:txBody>
+      </p:sp>
+      <p:sp>
+        <p:nvSpPr>
+          <p:cNvPr id="46" name="Rectangle 45"/>
+          <p:cNvSpPr/>
+          <p:nvPr/>
+        </p:nvSpPr>
+        <p:spPr>
+          <a:xfrm>
+            <a:off x="6181344" y="2286000"/>
+            <a:ext cx="2834640" cy="274320"/>
+          </a:xfrm>
+          <a:prstGeom prst="rect">
+            <a:avLst/>
+          </a:prstGeom>
+          <a:solidFill>
+            <a:srgbClr val="FFC000"/>
+          </a:solidFill>
+          <a:ln>
+            <a:noFill/>
+          </a:ln>
+        </p:spPr>
+        <p:style>
+          <a:lnRef idx="1">
+            <a:schemeClr val="accent1"/>
+          </a:lnRef>
+          <a:fillRef idx="3">
+            <a:schemeClr val="accent1"/>
+          </a:fillRef>
+          <a:effectRef idx="2">
+            <a:schemeClr val="accent1"/>
+          </a:effectRef>
+          <a:fontRef idx="minor">
+            <a:schemeClr val="lt1"/>
+          </a:fontRef>
+        </p:style>
+        <p:txBody>
+          <a:bodyPr rtlCol="0" anchor="ctr"/>
+          <a:lstStyle/>
+          <a:p>
+            <a:pPr algn="ctr"/>
+          </a:p>
+        </p:txBody>
+      </p:sp>
+      <p:sp>
+        <p:nvSpPr>
+          <p:cNvPr id="47" name="TextBox 46"/>
+          <p:cNvSpPr txBox="1"/>
+          <p:nvPr/>
+        </p:nvSpPr>
+        <p:spPr>
+          <a:xfrm>
+            <a:off x="6227064" y="2286000"/>
+            <a:ext cx="2834640" cy="274320"/>
+          </a:xfrm>
+          <a:prstGeom prst="rect">
+            <a:avLst/>
+          </a:prstGeom>
+          <a:noFill/>
+        </p:spPr>
+        <p:txBody>
+          <a:bodyPr wrap="square">
+            <a:spAutoFit/>
+          </a:bodyPr>
+          <a:lstStyle/>
+          <a:p>
+            <a:pPr algn="l"/>
+            <a:r>
+              <a:rPr sz="800" b="1" i="0">
+                <a:solidFill>
+                  <a:srgbClr val="FFFFFF"/>
+                </a:solidFill>
+              </a:rPr>
+              <a:t>Expected Benefit</a:t>
+            </a:r>
+          </a:p>
+        </p:txBody>
+      </p:sp>
+      <p:sp>
+        <p:nvSpPr>
+          <p:cNvPr id="48" name="Rectangle 47"/>
+          <p:cNvSpPr/>
+          <p:nvPr/>
+        </p:nvSpPr>
+        <p:spPr>
+          <a:xfrm>
+            <a:off x="6181344" y="2560320"/>
+            <a:ext cx="2834640" cy="1115568"/>
+          </a:xfrm>
+          <a:prstGeom prst="rect">
+            <a:avLst/>
+          </a:prstGeom>
+          <a:solidFill>
+            <a:srgbClr val="D5E8D4"/>
+          </a:solidFill>
+          <a:ln>
+            <a:noFill/>
+          </a:ln>
+        </p:spPr>
+        <p:style>
+          <a:lnRef idx="1">
+            <a:schemeClr val="accent1"/>
+          </a:lnRef>
+          <a:fillRef idx="3">
+            <a:schemeClr val="accent1"/>
+          </a:fillRef>
+          <a:effectRef idx="2">
+            <a:schemeClr val="accent1"/>
+          </a:effectRef>
+          <a:fontRef idx="minor">
+            <a:schemeClr val="lt1"/>
+          </a:fontRef>
+        </p:style>
+        <p:txBody>
+          <a:bodyPr rtlCol="0" anchor="ctr"/>
+          <a:lstStyle/>
+          <a:p>
+            <a:pPr algn="ctr"/>
+          </a:p>
+        </p:txBody>
+      </p:sp>
+      <p:sp>
+        <p:nvSpPr>
+          <p:cNvPr id="49" name="TextBox 48"/>
+          <p:cNvSpPr txBox="1"/>
+          <p:nvPr/>
+        </p:nvSpPr>
+        <p:spPr>
+          <a:xfrm>
+            <a:off x="6236208" y="2587752"/>
+            <a:ext cx="2724912" cy="1078992"/>
+          </a:xfrm>
+          <a:prstGeom prst="rect">
+            <a:avLst/>
+          </a:prstGeom>
+          <a:noFill/>
+        </p:spPr>
+        <p:txBody>
+          <a:bodyPr wrap="square">
+            <a:spAutoFit/>
+          </a:bodyPr>
+          <a:lstStyle/>
+          <a:p>
+            <a:pPr algn="l"/>
+            <a:r>
+              <a:rPr sz="800" b="0" i="0">
+                <a:solidFill>
+                  <a:srgbClr val="1F3864"/>
+                </a:solidFill>
+              </a:rPr>
+              <a:t>Accelerates all digital tool adoption; reduces transformation failure risk by 60%+</a:t>
+            </a:r>
+          </a:p>
+        </p:txBody>
+      </p:sp>
+      <p:sp>
+        <p:nvSpPr>
+          <p:cNvPr id="50" name="Rectangle 49"/>
+          <p:cNvSpPr/>
+          <p:nvPr/>
+        </p:nvSpPr>
+        <p:spPr>
+          <a:xfrm>
+            <a:off x="6181344" y="3703320"/>
+            <a:ext cx="2834640" cy="274320"/>
+          </a:xfrm>
+          <a:prstGeom prst="rect">
+            <a:avLst/>
+          </a:prstGeom>
+          <a:solidFill>
+            <a:srgbClr val="FF0000"/>
+          </a:solidFill>
+          <a:ln>
+            <a:noFill/>
+          </a:ln>
+        </p:spPr>
+        <p:style>
+          <a:lnRef idx="1">
+            <a:schemeClr val="accent1"/>
+          </a:lnRef>
+          <a:fillRef idx="3">
+            <a:schemeClr val="accent1"/>
+          </a:fillRef>
+          <a:effectRef idx="2">
+            <a:schemeClr val="accent1"/>
+          </a:effectRef>
+          <a:fontRef idx="minor">
+            <a:schemeClr val="lt1"/>
+          </a:fontRef>
+        </p:style>
+        <p:txBody>
+          <a:bodyPr rtlCol="0" anchor="ctr"/>
+          <a:lstStyle/>
+          <a:p>
+            <a:pPr algn="ctr"/>
+          </a:p>
+        </p:txBody>
+      </p:sp>
+      <p:sp>
+        <p:nvSpPr>
+          <p:cNvPr id="51" name="TextBox 50"/>
+          <p:cNvSpPr txBox="1"/>
+          <p:nvPr/>
+        </p:nvSpPr>
+        <p:spPr>
+          <a:xfrm>
+            <a:off x="6227064" y="3703320"/>
+            <a:ext cx="2834640" cy="274320"/>
+          </a:xfrm>
+          <a:prstGeom prst="rect">
+            <a:avLst/>
+          </a:prstGeom>
+          <a:noFill/>
+        </p:spPr>
+        <p:txBody>
+          <a:bodyPr wrap="square">
+            <a:spAutoFit/>
+          </a:bodyPr>
+          <a:lstStyle/>
+          <a:p>
+            <a:pPr algn="l"/>
+            <a:r>
+              <a:rPr sz="800" b="1" i="0">
+                <a:solidFill>
+                  <a:srgbClr val="FFFFFF"/>
+                </a:solidFill>
+              </a:rPr>
+              <a:t>Cost of Inaction</a:t>
+            </a:r>
+          </a:p>
+        </p:txBody>
+      </p:sp>
+      <p:sp>
+        <p:nvSpPr>
+          <p:cNvPr id="52" name="Rectangle 51"/>
+          <p:cNvSpPr/>
+          <p:nvPr/>
+        </p:nvSpPr>
+        <p:spPr>
+          <a:xfrm>
+            <a:off x="6181344" y="3977640"/>
+            <a:ext cx="2834640" cy="1115568"/>
+          </a:xfrm>
+          <a:prstGeom prst="rect">
+            <a:avLst/>
+          </a:prstGeom>
+          <a:solidFill>
+            <a:srgbClr val="F8CECC"/>
+          </a:solidFill>
+          <a:ln>
+            <a:noFill/>
+          </a:ln>
+        </p:spPr>
+        <p:style>
+          <a:lnRef idx="1">
+            <a:schemeClr val="accent1"/>
+          </a:lnRef>
+          <a:fillRef idx="3">
+            <a:schemeClr val="accent1"/>
+          </a:fillRef>
+          <a:effectRef idx="2">
+            <a:schemeClr val="accent1"/>
+          </a:effectRef>
+          <a:fontRef idx="minor">
+            <a:schemeClr val="lt1"/>
+          </a:fontRef>
+        </p:style>
+        <p:txBody>
+          <a:bodyPr rtlCol="0" anchor="ctr"/>
+          <a:lstStyle/>
+          <a:p>
+            <a:pPr algn="ctr"/>
+          </a:p>
+        </p:txBody>
+      </p:sp>
+      <p:sp>
+        <p:nvSpPr>
+          <p:cNvPr id="53" name="TextBox 52"/>
+          <p:cNvSpPr txBox="1"/>
+          <p:nvPr/>
+        </p:nvSpPr>
+        <p:spPr>
+          <a:xfrm>
+            <a:off x="6236208" y="4005072"/>
+            <a:ext cx="2724912" cy="1078992"/>
+          </a:xfrm>
+          <a:prstGeom prst="rect">
+            <a:avLst/>
+          </a:prstGeom>
+          <a:noFill/>
+        </p:spPr>
+        <p:txBody>
+          <a:bodyPr wrap="square">
+            <a:spAutoFit/>
+          </a:bodyPr>
+          <a:lstStyle/>
+          <a:p>
+            <a:pPr algn="l"/>
+            <a:r>
+              <a:rPr sz="800" b="0" i="0">
+                <a:solidFill>
+                  <a:srgbClr val="7F0000"/>
+                </a:solidFill>
+              </a:rPr>
+              <a:t>Technology without people = stranded investment; ERP + e-commerce will underperform</a:t>
+            </a:r>
+          </a:p>
+        </p:txBody>
+      </p:sp>
+      <p:sp>
+        <p:nvSpPr>
+          <p:cNvPr id="54" name="Rectangle 53"/>
+          <p:cNvSpPr/>
+          <p:nvPr/>
+        </p:nvSpPr>
+        <p:spPr>
+          <a:xfrm>
+            <a:off x="6181344" y="5120640"/>
+            <a:ext cx="2834640" cy="274320"/>
           </a:xfrm>
           <a:prstGeom prst="rect">
             <a:avLst/>
@@ -16031,14 +18086,14 @@
       </p:sp>
       <p:sp>
         <p:nvSpPr>
-          <p:cNvPr id="15" name="TextBox 14"/>
-          <p:cNvSpPr txBox="1"/>
-          <p:nvPr/>
-        </p:nvSpPr>
-        <p:spPr>
-          <a:xfrm>
-            <a:off x="411480" y="4389120"/>
-            <a:ext cx="2468880" cy="822960"/>
+          <p:cNvPr id="55" name="TextBox 54"/>
+          <p:cNvSpPr txBox="1"/>
+          <p:nvPr/>
+        </p:nvSpPr>
+        <p:spPr>
+          <a:xfrm>
+            <a:off x="6227064" y="5120640"/>
+            <a:ext cx="2834640" cy="274320"/>
           </a:xfrm>
           <a:prstGeom prst="rect">
             <a:avLst/>
@@ -16053,26 +18108,257 @@
           <a:p>
             <a:pPr algn="l"/>
             <a:r>
+              <a:rPr sz="800" b="1" i="0">
+                <a:solidFill>
+                  <a:srgbClr val="FFFFFF"/>
+                </a:solidFill>
+              </a:rPr>
+              <a:t>Why Now</a:t>
+            </a:r>
+          </a:p>
+        </p:txBody>
+      </p:sp>
+      <p:sp>
+        <p:nvSpPr>
+          <p:cNvPr id="56" name="Rectangle 55"/>
+          <p:cNvSpPr/>
+          <p:nvPr/>
+        </p:nvSpPr>
+        <p:spPr>
+          <a:xfrm>
+            <a:off x="6181344" y="5394960"/>
+            <a:ext cx="2834640" cy="1115568"/>
+          </a:xfrm>
+          <a:prstGeom prst="rect">
+            <a:avLst/>
+          </a:prstGeom>
+          <a:solidFill>
+            <a:srgbClr val="DAE8FC"/>
+          </a:solidFill>
+          <a:ln>
+            <a:noFill/>
+          </a:ln>
+        </p:spPr>
+        <p:style>
+          <a:lnRef idx="1">
+            <a:schemeClr val="accent1"/>
+          </a:lnRef>
+          <a:fillRef idx="3">
+            <a:schemeClr val="accent1"/>
+          </a:fillRef>
+          <a:effectRef idx="2">
+            <a:schemeClr val="accent1"/>
+          </a:effectRef>
+          <a:fontRef idx="minor">
+            <a:schemeClr val="lt1"/>
+          </a:fontRef>
+        </p:style>
+        <p:txBody>
+          <a:bodyPr rtlCol="0" anchor="ctr"/>
+          <a:lstStyle/>
+          <a:p>
+            <a:pPr algn="ctr"/>
+          </a:p>
+        </p:txBody>
+      </p:sp>
+      <p:sp>
+        <p:nvSpPr>
+          <p:cNvPr id="57" name="TextBox 56"/>
+          <p:cNvSpPr txBox="1"/>
+          <p:nvPr/>
+        </p:nvSpPr>
+        <p:spPr>
+          <a:xfrm>
+            <a:off x="6236208" y="5422392"/>
+            <a:ext cx="2724912" cy="1078992"/>
+          </a:xfrm>
+          <a:prstGeom prst="rect">
+            <a:avLst/>
+          </a:prstGeom>
+          <a:noFill/>
+        </p:spPr>
+        <p:txBody>
+          <a:bodyPr wrap="square">
+            <a:spAutoFit/>
+          </a:bodyPr>
+          <a:lstStyle/>
+          <a:p>
+            <a:pPr algn="l"/>
+            <a:r>
+              <a:rPr sz="800" b="0" i="0">
+                <a:solidFill>
+                  <a:srgbClr val="1F3864"/>
+                </a:solidFill>
+              </a:rPr>
+              <a:t>Digital skills gap widening; early movers gain 2–3 yr head start on talent</a:t>
+            </a:r>
+          </a:p>
+        </p:txBody>
+      </p:sp>
+      <p:sp>
+        <p:nvSpPr>
+          <p:cNvPr id="58" name="Rectangle 57"/>
+          <p:cNvSpPr/>
+          <p:nvPr/>
+        </p:nvSpPr>
+        <p:spPr>
+          <a:xfrm>
+            <a:off x="9134856" y="1051560"/>
+            <a:ext cx="2834640" cy="384048"/>
+          </a:xfrm>
+          <a:prstGeom prst="rect">
+            <a:avLst/>
+          </a:prstGeom>
+          <a:solidFill>
+            <a:srgbClr val="FFC000"/>
+          </a:solidFill>
+          <a:ln>
+            <a:noFill/>
+          </a:ln>
+        </p:spPr>
+        <p:style>
+          <a:lnRef idx="1">
+            <a:schemeClr val="accent1"/>
+          </a:lnRef>
+          <a:fillRef idx="3">
+            <a:schemeClr val="accent1"/>
+          </a:fillRef>
+          <a:effectRef idx="2">
+            <a:schemeClr val="accent1"/>
+          </a:effectRef>
+          <a:fontRef idx="minor">
+            <a:schemeClr val="lt1"/>
+          </a:fontRef>
+        </p:style>
+        <p:txBody>
+          <a:bodyPr rtlCol="0" anchor="ctr"/>
+          <a:lstStyle/>
+          <a:p>
+            <a:pPr algn="ctr"/>
+          </a:p>
+        </p:txBody>
+      </p:sp>
+      <p:sp>
+        <p:nvSpPr>
+          <p:cNvPr id="59" name="TextBox 58"/>
+          <p:cNvSpPr txBox="1"/>
+          <p:nvPr/>
+        </p:nvSpPr>
+        <p:spPr>
+          <a:xfrm>
+            <a:off x="9134856" y="1051560"/>
+            <a:ext cx="2834640" cy="384048"/>
+          </a:xfrm>
+          <a:prstGeom prst="rect">
+            <a:avLst/>
+          </a:prstGeom>
+          <a:noFill/>
+        </p:spPr>
+        <p:txBody>
+          <a:bodyPr wrap="square">
+            <a:spAutoFit/>
+          </a:bodyPr>
+          <a:lstStyle/>
+          <a:p>
+            <a:pPr algn="ctr"/>
+            <a:r>
               <a:rPr sz="1000" b="1" i="0">
                 <a:solidFill>
                   <a:srgbClr val="FFFFFF"/>
                 </a:solidFill>
               </a:rPr>
-              <a:t>Immediate due diligence asks</a:t>
-            </a:r>
-          </a:p>
-        </p:txBody>
-      </p:sp>
-      <p:sp>
-        <p:nvSpPr>
-          <p:cNvPr id="16" name="Rectangle 15"/>
-          <p:cNvSpPr/>
-          <p:nvPr/>
-        </p:nvSpPr>
-        <p:spPr>
-          <a:xfrm>
-            <a:off x="3017520" y="4297680"/>
-            <a:ext cx="8778240" cy="1005840"/>
+              <a:t>#04  MEDIUM</a:t>
+            </a:r>
+          </a:p>
+        </p:txBody>
+      </p:sp>
+      <p:sp>
+        <p:nvSpPr>
+          <p:cNvPr id="60" name="Rectangle 59"/>
+          <p:cNvSpPr/>
+          <p:nvPr/>
+        </p:nvSpPr>
+        <p:spPr>
+          <a:xfrm>
+            <a:off x="9134856" y="1463040"/>
+            <a:ext cx="2834640" cy="475488"/>
+          </a:xfrm>
+          <a:prstGeom prst="rect">
+            <a:avLst/>
+          </a:prstGeom>
+          <a:solidFill>
+            <a:srgbClr val="2E75B6"/>
+          </a:solidFill>
+          <a:ln>
+            <a:noFill/>
+          </a:ln>
+        </p:spPr>
+        <p:style>
+          <a:lnRef idx="1">
+            <a:schemeClr val="accent1"/>
+          </a:lnRef>
+          <a:fillRef idx="3">
+            <a:schemeClr val="accent1"/>
+          </a:fillRef>
+          <a:effectRef idx="2">
+            <a:schemeClr val="accent1"/>
+          </a:effectRef>
+          <a:fontRef idx="minor">
+            <a:schemeClr val="lt1"/>
+          </a:fontRef>
+        </p:style>
+        <p:txBody>
+          <a:bodyPr rtlCol="0" anchor="ctr"/>
+          <a:lstStyle/>
+          <a:p>
+            <a:pPr algn="ctr"/>
+          </a:p>
+        </p:txBody>
+      </p:sp>
+      <p:sp>
+        <p:nvSpPr>
+          <p:cNvPr id="61" name="TextBox 60"/>
+          <p:cNvSpPr txBox="1"/>
+          <p:nvPr/>
+        </p:nvSpPr>
+        <p:spPr>
+          <a:xfrm>
+            <a:off x="9180576" y="1481328"/>
+            <a:ext cx="2743200" cy="438912"/>
+          </a:xfrm>
+          <a:prstGeom prst="rect">
+            <a:avLst/>
+          </a:prstGeom>
+          <a:noFill/>
+        </p:spPr>
+        <p:txBody>
+          <a:bodyPr wrap="square">
+            <a:spAutoFit/>
+          </a:bodyPr>
+          <a:lstStyle/>
+          <a:p>
+            <a:pPr algn="l"/>
+            <a:r>
+              <a:rPr sz="1100" b="1" i="0">
+                <a:solidFill>
+                  <a:srgbClr val="FFFFFF"/>
+                </a:solidFill>
+              </a:rPr>
+              <a:t>Smart Factory Showcase — Coimbatore Plant</a:t>
+            </a:r>
+          </a:p>
+        </p:txBody>
+      </p:sp>
+      <p:sp>
+        <p:nvSpPr>
+          <p:cNvPr id="62" name="Rectangle 61"/>
+          <p:cNvSpPr/>
+          <p:nvPr/>
+        </p:nvSpPr>
+        <p:spPr>
+          <a:xfrm>
+            <a:off x="9134856" y="1965960"/>
+            <a:ext cx="2834640" cy="292608"/>
           </a:xfrm>
           <a:prstGeom prst="rect">
             <a:avLst/>
@@ -16108,14 +18394,14 @@
       </p:sp>
       <p:sp>
         <p:nvSpPr>
-          <p:cNvPr id="17" name="TextBox 16"/>
-          <p:cNvSpPr txBox="1"/>
-          <p:nvPr/>
-        </p:nvSpPr>
-        <p:spPr>
-          <a:xfrm>
-            <a:off x="3108960" y="4343400"/>
-            <a:ext cx="8595360" cy="914400"/>
+          <p:cNvPr id="63" name="TextBox 62"/>
+          <p:cNvSpPr txBox="1"/>
+          <p:nvPr/>
+        </p:nvSpPr>
+        <p:spPr>
+          <a:xfrm>
+            <a:off x="9180576" y="1975104"/>
+            <a:ext cx="2743200" cy="274320"/>
           </a:xfrm>
           <a:prstGeom prst="rect">
             <a:avLst/>
@@ -16130,26 +18416,334 @@
           <a:p>
             <a:pPr algn="l"/>
             <a:r>
-              <a:rPr sz="900" b="0" i="0">
+              <a:rPr sz="800" b="1" i="0">
                 <a:solidFill>
                   <a:srgbClr val="1F3864"/>
                 </a:solidFill>
               </a:rPr>
-              <a:t>1. Full audited P&amp;L + balance sheet for FY2023–FY2025. 2. Customer concentration report (top 10 customers as % of revenue). 3. Director disclosure and related-party transactions. 4. Status of expansion into electric actuators / robotics — capex plan.</a:t>
-            </a:r>
-          </a:p>
-        </p:txBody>
-      </p:sp>
-      <p:sp>
-        <p:nvSpPr>
-          <p:cNvPr id="18" name="Rectangle 17"/>
-          <p:cNvSpPr/>
-          <p:nvPr/>
-        </p:nvSpPr>
-        <p:spPr>
-          <a:xfrm>
-            <a:off x="365760" y="5486400"/>
-            <a:ext cx="2560320" cy="1005840"/>
+              <a:t>Gap: TA01: 65/100 · ST03: 75/100</a:t>
+            </a:r>
+          </a:p>
+        </p:txBody>
+      </p:sp>
+      <p:sp>
+        <p:nvSpPr>
+          <p:cNvPr id="64" name="Rectangle 63"/>
+          <p:cNvSpPr/>
+          <p:nvPr/>
+        </p:nvSpPr>
+        <p:spPr>
+          <a:xfrm>
+            <a:off x="9134856" y="2286000"/>
+            <a:ext cx="2834640" cy="274320"/>
+          </a:xfrm>
+          <a:prstGeom prst="rect">
+            <a:avLst/>
+          </a:prstGeom>
+          <a:solidFill>
+            <a:srgbClr val="FFC000"/>
+          </a:solidFill>
+          <a:ln>
+            <a:noFill/>
+          </a:ln>
+        </p:spPr>
+        <p:style>
+          <a:lnRef idx="1">
+            <a:schemeClr val="accent1"/>
+          </a:lnRef>
+          <a:fillRef idx="3">
+            <a:schemeClr val="accent1"/>
+          </a:fillRef>
+          <a:effectRef idx="2">
+            <a:schemeClr val="accent1"/>
+          </a:effectRef>
+          <a:fontRef idx="minor">
+            <a:schemeClr val="lt1"/>
+          </a:fontRef>
+        </p:style>
+        <p:txBody>
+          <a:bodyPr rtlCol="0" anchor="ctr"/>
+          <a:lstStyle/>
+          <a:p>
+            <a:pPr algn="ctr"/>
+          </a:p>
+        </p:txBody>
+      </p:sp>
+      <p:sp>
+        <p:nvSpPr>
+          <p:cNvPr id="65" name="TextBox 64"/>
+          <p:cNvSpPr txBox="1"/>
+          <p:nvPr/>
+        </p:nvSpPr>
+        <p:spPr>
+          <a:xfrm>
+            <a:off x="9180576" y="2286000"/>
+            <a:ext cx="2834640" cy="274320"/>
+          </a:xfrm>
+          <a:prstGeom prst="rect">
+            <a:avLst/>
+          </a:prstGeom>
+          <a:noFill/>
+        </p:spPr>
+        <p:txBody>
+          <a:bodyPr wrap="square">
+            <a:spAutoFit/>
+          </a:bodyPr>
+          <a:lstStyle/>
+          <a:p>
+            <a:pPr algn="l"/>
+            <a:r>
+              <a:rPr sz="800" b="1" i="0">
+                <a:solidFill>
+                  <a:srgbClr val="FFFFFF"/>
+                </a:solidFill>
+              </a:rPr>
+              <a:t>Expected Benefit</a:t>
+            </a:r>
+          </a:p>
+        </p:txBody>
+      </p:sp>
+      <p:sp>
+        <p:nvSpPr>
+          <p:cNvPr id="66" name="Rectangle 65"/>
+          <p:cNvSpPr/>
+          <p:nvPr/>
+        </p:nvSpPr>
+        <p:spPr>
+          <a:xfrm>
+            <a:off x="9134856" y="2560320"/>
+            <a:ext cx="2834640" cy="1115568"/>
+          </a:xfrm>
+          <a:prstGeom prst="rect">
+            <a:avLst/>
+          </a:prstGeom>
+          <a:solidFill>
+            <a:srgbClr val="D5E8D4"/>
+          </a:solidFill>
+          <a:ln>
+            <a:noFill/>
+          </a:ln>
+        </p:spPr>
+        <p:style>
+          <a:lnRef idx="1">
+            <a:schemeClr val="accent1"/>
+          </a:lnRef>
+          <a:fillRef idx="3">
+            <a:schemeClr val="accent1"/>
+          </a:fillRef>
+          <a:effectRef idx="2">
+            <a:schemeClr val="accent1"/>
+          </a:effectRef>
+          <a:fontRef idx="minor">
+            <a:schemeClr val="lt1"/>
+          </a:fontRef>
+        </p:style>
+        <p:txBody>
+          <a:bodyPr rtlCol="0" anchor="ctr"/>
+          <a:lstStyle/>
+          <a:p>
+            <a:pPr algn="ctr"/>
+          </a:p>
+        </p:txBody>
+      </p:sp>
+      <p:sp>
+        <p:nvSpPr>
+          <p:cNvPr id="67" name="TextBox 66"/>
+          <p:cNvSpPr txBox="1"/>
+          <p:nvPr/>
+        </p:nvSpPr>
+        <p:spPr>
+          <a:xfrm>
+            <a:off x="9189720" y="2587752"/>
+            <a:ext cx="2724912" cy="1078992"/>
+          </a:xfrm>
+          <a:prstGeom prst="rect">
+            <a:avLst/>
+          </a:prstGeom>
+          <a:noFill/>
+        </p:spPr>
+        <p:txBody>
+          <a:bodyPr wrap="square">
+            <a:spAutoFit/>
+          </a:bodyPr>
+          <a:lstStyle/>
+          <a:p>
+            <a:pPr algn="l"/>
+            <a:r>
+              <a:rPr sz="800" b="0" i="0">
+                <a:solidFill>
+                  <a:srgbClr val="1F3864"/>
+                </a:solidFill>
+              </a:rPr>
+              <a:t>Credibility proof-by-example; accelerates I4.0 sales cycles; OEM audit readiness</a:t>
+            </a:r>
+          </a:p>
+        </p:txBody>
+      </p:sp>
+      <p:sp>
+        <p:nvSpPr>
+          <p:cNvPr id="68" name="Rectangle 67"/>
+          <p:cNvSpPr/>
+          <p:nvPr/>
+        </p:nvSpPr>
+        <p:spPr>
+          <a:xfrm>
+            <a:off x="9134856" y="3703320"/>
+            <a:ext cx="2834640" cy="274320"/>
+          </a:xfrm>
+          <a:prstGeom prst="rect">
+            <a:avLst/>
+          </a:prstGeom>
+          <a:solidFill>
+            <a:srgbClr val="FF0000"/>
+          </a:solidFill>
+          <a:ln>
+            <a:noFill/>
+          </a:ln>
+        </p:spPr>
+        <p:style>
+          <a:lnRef idx="1">
+            <a:schemeClr val="accent1"/>
+          </a:lnRef>
+          <a:fillRef idx="3">
+            <a:schemeClr val="accent1"/>
+          </a:fillRef>
+          <a:effectRef idx="2">
+            <a:schemeClr val="accent1"/>
+          </a:effectRef>
+          <a:fontRef idx="minor">
+            <a:schemeClr val="lt1"/>
+          </a:fontRef>
+        </p:style>
+        <p:txBody>
+          <a:bodyPr rtlCol="0" anchor="ctr"/>
+          <a:lstStyle/>
+          <a:p>
+            <a:pPr algn="ctr"/>
+          </a:p>
+        </p:txBody>
+      </p:sp>
+      <p:sp>
+        <p:nvSpPr>
+          <p:cNvPr id="69" name="TextBox 68"/>
+          <p:cNvSpPr txBox="1"/>
+          <p:nvPr/>
+        </p:nvSpPr>
+        <p:spPr>
+          <a:xfrm>
+            <a:off x="9180576" y="3703320"/>
+            <a:ext cx="2834640" cy="274320"/>
+          </a:xfrm>
+          <a:prstGeom prst="rect">
+            <a:avLst/>
+          </a:prstGeom>
+          <a:noFill/>
+        </p:spPr>
+        <p:txBody>
+          <a:bodyPr wrap="square">
+            <a:spAutoFit/>
+          </a:bodyPr>
+          <a:lstStyle/>
+          <a:p>
+            <a:pPr algn="l"/>
+            <a:r>
+              <a:rPr sz="800" b="1" i="0">
+                <a:solidFill>
+                  <a:srgbClr val="FFFFFF"/>
+                </a:solidFill>
+              </a:rPr>
+              <a:t>Cost of Inaction</a:t>
+            </a:r>
+          </a:p>
+        </p:txBody>
+      </p:sp>
+      <p:sp>
+        <p:nvSpPr>
+          <p:cNvPr id="70" name="Rectangle 69"/>
+          <p:cNvSpPr/>
+          <p:nvPr/>
+        </p:nvSpPr>
+        <p:spPr>
+          <a:xfrm>
+            <a:off x="9134856" y="3977640"/>
+            <a:ext cx="2834640" cy="1115568"/>
+          </a:xfrm>
+          <a:prstGeom prst="rect">
+            <a:avLst/>
+          </a:prstGeom>
+          <a:solidFill>
+            <a:srgbClr val="F8CECC"/>
+          </a:solidFill>
+          <a:ln>
+            <a:noFill/>
+          </a:ln>
+        </p:spPr>
+        <p:style>
+          <a:lnRef idx="1">
+            <a:schemeClr val="accent1"/>
+          </a:lnRef>
+          <a:fillRef idx="3">
+            <a:schemeClr val="accent1"/>
+          </a:fillRef>
+          <a:effectRef idx="2">
+            <a:schemeClr val="accent1"/>
+          </a:effectRef>
+          <a:fontRef idx="minor">
+            <a:schemeClr val="lt1"/>
+          </a:fontRef>
+        </p:style>
+        <p:txBody>
+          <a:bodyPr rtlCol="0" anchor="ctr"/>
+          <a:lstStyle/>
+          <a:p>
+            <a:pPr algn="ctr"/>
+          </a:p>
+        </p:txBody>
+      </p:sp>
+      <p:sp>
+        <p:nvSpPr>
+          <p:cNvPr id="71" name="TextBox 70"/>
+          <p:cNvSpPr txBox="1"/>
+          <p:nvPr/>
+        </p:nvSpPr>
+        <p:spPr>
+          <a:xfrm>
+            <a:off x="9189720" y="4005072"/>
+            <a:ext cx="2724912" cy="1078992"/>
+          </a:xfrm>
+          <a:prstGeom prst="rect">
+            <a:avLst/>
+          </a:prstGeom>
+          <a:noFill/>
+        </p:spPr>
+        <p:txBody>
+          <a:bodyPr wrap="square">
+            <a:spAutoFit/>
+          </a:bodyPr>
+          <a:lstStyle/>
+          <a:p>
+            <a:pPr algn="l"/>
+            <a:r>
+              <a:rPr sz="800" b="0" i="0">
+                <a:solidFill>
+                  <a:srgbClr val="7F0000"/>
+                </a:solidFill>
+              </a:rPr>
+              <a:t>Selling I4.0 while running a non-digitized plant is a credibility gap buyers detect</a:t>
+            </a:r>
+          </a:p>
+        </p:txBody>
+      </p:sp>
+      <p:sp>
+        <p:nvSpPr>
+          <p:cNvPr id="72" name="Rectangle 71"/>
+          <p:cNvSpPr/>
+          <p:nvPr/>
+        </p:nvSpPr>
+        <p:spPr>
+          <a:xfrm>
+            <a:off x="9134856" y="5120640"/>
+            <a:ext cx="2834640" cy="274320"/>
           </a:xfrm>
           <a:prstGeom prst="rect">
             <a:avLst/>
@@ -16185,14 +18779,14 @@
       </p:sp>
       <p:sp>
         <p:nvSpPr>
-          <p:cNvPr id="19" name="TextBox 18"/>
-          <p:cNvSpPr txBox="1"/>
-          <p:nvPr/>
-        </p:nvSpPr>
-        <p:spPr>
-          <a:xfrm>
-            <a:off x="411480" y="5577840"/>
-            <a:ext cx="2468880" cy="822960"/>
+          <p:cNvPr id="73" name="TextBox 72"/>
+          <p:cNvSpPr txBox="1"/>
+          <p:nvPr/>
+        </p:nvSpPr>
+        <p:spPr>
+          <a:xfrm>
+            <a:off x="9180576" y="5120640"/>
+            <a:ext cx="2834640" cy="274320"/>
           </a:xfrm>
           <a:prstGeom prst="rect">
             <a:avLst/>
@@ -16207,69 +18801,69 @@
           <a:p>
             <a:pPr algn="l"/>
             <a:r>
-              <a:rPr sz="1000" b="1" i="0">
+              <a:rPr sz="800" b="1" i="0">
                 <a:solidFill>
                   <a:srgbClr val="FFFFFF"/>
                 </a:solidFill>
               </a:rPr>
-              <a:t>Opportunity</a:t>
-            </a:r>
-          </a:p>
-        </p:txBody>
-      </p:sp>
-      <p:sp>
-        <p:nvSpPr>
-          <p:cNvPr id="20" name="Rectangle 19"/>
-          <p:cNvSpPr/>
-          <p:nvPr/>
-        </p:nvSpPr>
-        <p:spPr>
-          <a:xfrm>
-            <a:off x="3017520" y="5486400"/>
-            <a:ext cx="8778240" cy="1005840"/>
-          </a:xfrm>
-          <a:prstGeom prst="rect">
-            <a:avLst/>
-          </a:prstGeom>
-          <a:solidFill>
-            <a:srgbClr val="D6E4F0"/>
-          </a:solidFill>
-          <a:ln>
-            <a:noFill/>
-          </a:ln>
-        </p:spPr>
-        <p:style>
-          <a:lnRef idx="1">
-            <a:schemeClr val="accent1"/>
-          </a:lnRef>
-          <a:fillRef idx="3">
-            <a:schemeClr val="accent1"/>
-          </a:fillRef>
-          <a:effectRef idx="2">
-            <a:schemeClr val="accent1"/>
-          </a:effectRef>
-          <a:fontRef idx="minor">
-            <a:schemeClr val="lt1"/>
-          </a:fontRef>
-        </p:style>
-        <p:txBody>
-          <a:bodyPr rtlCol="0" anchor="ctr"/>
-          <a:lstStyle/>
-          <a:p>
-            <a:pPr algn="ctr"/>
-          </a:p>
-        </p:txBody>
-      </p:sp>
-      <p:sp>
-        <p:nvSpPr>
-          <p:cNvPr id="21" name="TextBox 20"/>
-          <p:cNvSpPr txBox="1"/>
-          <p:nvPr/>
-        </p:nvSpPr>
-        <p:spPr>
-          <a:xfrm>
-            <a:off x="3108960" y="5532120"/>
-            <a:ext cx="8595360" cy="914400"/>
+              <a:t>Why Now</a:t>
+            </a:r>
+          </a:p>
+        </p:txBody>
+      </p:sp>
+      <p:sp>
+        <p:nvSpPr>
+          <p:cNvPr id="74" name="Rectangle 73"/>
+          <p:cNvSpPr/>
+          <p:nvPr/>
+        </p:nvSpPr>
+        <p:spPr>
+          <a:xfrm>
+            <a:off x="9134856" y="5394960"/>
+            <a:ext cx="2834640" cy="1115568"/>
+          </a:xfrm>
+          <a:prstGeom prst="rect">
+            <a:avLst/>
+          </a:prstGeom>
+          <a:solidFill>
+            <a:srgbClr val="DAE8FC"/>
+          </a:solidFill>
+          <a:ln>
+            <a:noFill/>
+          </a:ln>
+        </p:spPr>
+        <p:style>
+          <a:lnRef idx="1">
+            <a:schemeClr val="accent1"/>
+          </a:lnRef>
+          <a:fillRef idx="3">
+            <a:schemeClr val="accent1"/>
+          </a:fillRef>
+          <a:effectRef idx="2">
+            <a:schemeClr val="accent1"/>
+          </a:effectRef>
+          <a:fontRef idx="minor">
+            <a:schemeClr val="lt1"/>
+          </a:fontRef>
+        </p:style>
+        <p:txBody>
+          <a:bodyPr rtlCol="0" anchor="ctr"/>
+          <a:lstStyle/>
+          <a:p>
+            <a:pPr algn="ctr"/>
+          </a:p>
+        </p:txBody>
+      </p:sp>
+      <p:sp>
+        <p:nvSpPr>
+          <p:cNvPr id="75" name="TextBox 74"/>
+          <p:cNvSpPr txBox="1"/>
+          <p:nvPr/>
+        </p:nvSpPr>
+        <p:spPr>
+          <a:xfrm>
+            <a:off x="9189720" y="5422392"/>
+            <a:ext cx="2724912" cy="1078992"/>
           </a:xfrm>
           <a:prstGeom prst="rect">
             <a:avLst/>
@@ -16284,46 +18878,48 @@
           <a:p>
             <a:pPr algn="l"/>
             <a:r>
-              <a:rPr sz="900" b="0" i="0">
+              <a:rPr sz="800" b="0" i="0">
                 <a:solidFill>
                   <a:srgbClr val="1F3864"/>
                 </a:solidFill>
               </a:rPr>
-              <a:t>Make in India + China+1 export tailwind creates a 3–5 year window for Janatics to gain global OEM approvals. A partner with procurement or market access in Europe/Americas could accelerate this significantly.</a:t>
-            </a:r>
-          </a:p>
-        </p:txBody>
-      </p:sp>
-      <p:sp>
-        <p:nvSpPr>
-          <p:cNvPr id="22" name="TextBox 21"/>
-          <p:cNvSpPr txBox="1"/>
-          <p:nvPr/>
-        </p:nvSpPr>
-        <p:spPr>
-          <a:xfrm>
-            <a:off x="365760" y="6492240"/>
-            <a:ext cx="11430000" cy="274320"/>
-          </a:xfrm>
-          <a:prstGeom prst="rect">
-            <a:avLst/>
-          </a:prstGeom>
-          <a:noFill/>
-        </p:spPr>
-        <p:txBody>
-          <a:bodyPr wrap="square">
-            <a:spAutoFit/>
-          </a:bodyPr>
-          <a:lstStyle/>
-          <a:p>
-            <a:pPr algn="ctr"/>
-            <a:r>
-              <a:rPr sz="800" b="0" i="1">
-                <a:solidFill>
-                  <a:srgbClr val="404040"/>
-                </a:solidFill>
-              </a:rPr>
-              <a:t>Report generated: 19 April 2026  |  Janatics India Private Limited  |  DDMR v1.0</a:t>
+              <a:t>Janatics owns the tech — fastest credibility play with no new vendor or capex risk</a:t>
+            </a:r>
+          </a:p>
+        </p:txBody>
+      </p:sp>
+      <p:sp>
+        <p:nvSpPr>
+          <p:cNvPr id="76" name="TextBox 75"/>
+          <p:cNvSpPr txBox="1"/>
+          <p:nvPr/>
+        </p:nvSpPr>
+        <p:spPr>
+          <a:xfrm>
+            <a:off x="274320" y="6492240"/>
+            <a:ext cx="11612880" cy="274320"/>
+          </a:xfrm>
+          <a:prstGeom prst="rect">
+            <a:avLst/>
+          </a:prstGeom>
+          <a:solidFill>
+            <a:srgbClr val="2E75B6"/>
+          </a:solidFill>
+        </p:spPr>
+        <p:txBody>
+          <a:bodyPr wrap="square">
+            <a:spAutoFit/>
+          </a:bodyPr>
+          <a:lstStyle/>
+          <a:p>
+            <a:pPr algn="ctr"/>
+            <a:r>
+              <a:rPr sz="900" b="1" i="0">
+                <a:solidFill>
+                  <a:srgbClr val="FFFFFF"/>
+                </a:solidFill>
+              </a:rPr>
+              <a:t>Maturity band target after initiatives: Siloed → Strategic (67–83)</a:t>
             </a:r>
           </a:p>
         </p:txBody>
